--- a/スライド/ch07.pptx
+++ b/スライド/ch07.pptx
@@ -688,7 +688,7 @@
           <a:p/>
           <a:p>
             <a:r>
-              <a:t>_class: sections</a:t>
+              <a:t>_class: figure-full</a:t>
             </a:r>
           </a:p>
         </p:txBody>
@@ -758,13 +758,13 @@
           <a:lstStyle/>
           <a:p>
             <a:r>
-              <a:t>③で H の意味を強調する。H = 4 s なら、入力が止まっても運動エネルギーだけで 4 秒間は定格出力を出せる、という貯金の大きさ。</a:t>
+              <a:t>前の 1 枚に ② を足しただけ。薄い段はまだ出していない段。</a:t>
             </a:r>
           </a:p>
           <a:p/>
           <a:p>
             <a:r>
-              <a:t>_class: sections</a:t>
+              <a:t>_class: figure-full</a:t>
             </a:r>
           </a:p>
         </p:txBody>
@@ -834,13 +834,13 @@
           <a:lstStyle/>
           <a:p>
             <a:r>
-              <a:t>③で H の意味を強調する。H = 4 s なら、入力が止まっても運動エネルギーだけで 4 秒間は定格出力を出せる、という貯金の大きさ。</a:t>
+              <a:t>前の 1 枚に ③ を足しただけ。薄い段はまだ出していない段。</a:t>
             </a:r>
           </a:p>
           <a:p/>
           <a:p>
             <a:r>
-              <a:t>_class: sections</a:t>
+              <a:t>_class: figure-full</a:t>
             </a:r>
           </a:p>
         </p:txBody>
@@ -1138,7 +1138,7 @@
           <a:p/>
           <a:p>
             <a:r>
-              <a:t>_class: sections</a:t>
+              <a:t>_class: figure-full</a:t>
             </a:r>
           </a:p>
         </p:txBody>
@@ -1208,13 +1208,13 @@
           <a:lstStyle/>
           <a:p>
             <a:r>
-              <a:t>「面積＝エネルギー」は②で出る。ここが等面積法の核心なので、板書で δ' を掛ける操作を見せる。</a:t>
+              <a:t>前の 1 枚に ② を足しただけ。薄い段はまだ出していない段。</a:t>
             </a:r>
           </a:p>
           <a:p/>
           <a:p>
             <a:r>
-              <a:t>_class: sections</a:t>
+              <a:t>_class: figure-full</a:t>
             </a:r>
           </a:p>
         </p:txBody>
@@ -1284,13 +1284,13 @@
           <a:lstStyle/>
           <a:p>
             <a:r>
-              <a:t>「面積＝エネルギー」は②で出る。ここが等面積法の核心なので、板書で δ' を掛ける操作を見せる。</a:t>
+              <a:t>前の 1 枚に ③ を足しただけ。薄い段はまだ出していない段。</a:t>
             </a:r>
           </a:p>
           <a:p/>
           <a:p>
             <a:r>
-              <a:t>_class: sections</a:t>
+              <a:t>_class: figure-full</a:t>
             </a:r>
           </a:p>
         </p:txBody>
@@ -7298,59 +7298,14 @@
       <p:grpSpPr/>
       <p:sp>
         <p:nvSpPr>
-          <p:cNvPr id="2" name="TextBox 1"/>
+          <p:cNvPr id="2" name="edge:title"/>
           <p:cNvSpPr txBox="1"/>
           <p:nvPr/>
         </p:nvSpPr>
         <p:spPr>
           <a:xfrm>
-            <a:off x="566928" y="457200"/>
-            <a:ext cx="11057839" cy="658368"/>
-          </a:xfrm>
-          <a:prstGeom prst="rect">
-            <a:avLst/>
-          </a:prstGeom>
-          <a:noFill/>
-        </p:spPr>
-        <p:txBody>
-          <a:bodyPr wrap="square" lIns="0" rIns="0" tIns="0" bIns="0" anchor="ctr">
-            <a:noAutofit/>
-          </a:bodyPr>
-          <a:lstStyle/>
-          <a:p>
-            <a:pPr>
-              <a:lnSpc>
-                <a:spcPct val="106000"/>
-              </a:lnSpc>
-              <a:defRPr sz="3390" b="1">
-                <a:solidFill>
-                  <a:srgbClr val="7C332A"/>
-                </a:solidFill>
-                <a:latin typeface="Avenir Next"/>
-                <a:ea typeface="Hiragino Sans"/>
-                <a:cs typeface="Hiragino Sans"/>
-              </a:defRPr>
-            </a:pPr>
-            <a:r>
-              <a:rPr>
-                <a:ea typeface="Hiragino Sans"/>
-                <a:cs typeface="Hiragino Sans"/>
-              </a:rPr>
-              <a:t>導出 — 動揺方程式はニュートンの運動方程式</a:t>
-            </a:r>
-          </a:p>
-        </p:txBody>
-      </p:sp>
-      <p:sp>
-        <p:nvSpPr>
-          <p:cNvPr id="3" name="TextBox 2"/>
-          <p:cNvSpPr txBox="1"/>
-          <p:nvPr/>
-        </p:nvSpPr>
-        <p:spPr>
-          <a:xfrm>
-            <a:off x="566928" y="2384775"/>
-            <a:ext cx="11057839" cy="254000"/>
+            <a:off x="566928" y="146304"/>
+            <a:ext cx="11057839" cy="457200"/>
           </a:xfrm>
           <a:prstGeom prst="rect">
             <a:avLst/>
@@ -7363,30 +7318,60 @@
           </a:bodyPr>
           <a:lstStyle/>
           <a:p>
-            <a:r>
-              <a:rPr sz="1600" b="1">
-                <a:solidFill>
-                  <a:srgbClr val="5C7268"/>
-                </a:solidFill>
-                <a:latin typeface="Avenir Next"/>
-                <a:ea typeface="Hiragino Sans"/>
-                <a:cs typeface="Hiragino Sans"/>
-              </a:rPr>
-              <a:t>① 回転体の運動方程式｜J θ'' = T_m − T_e</a:t>
-            </a:r>
-          </a:p>
-        </p:txBody>
-      </p:sp>
-      <p:sp>
-        <p:nvSpPr>
-          <p:cNvPr id="4" name="TextBox 3"/>
+            <a:pPr>
+              <a:defRPr sz="2400" b="1">
+                <a:solidFill>
+                  <a:srgbClr val="7C332A"/>
+                </a:solidFill>
+                <a:latin typeface="Avenir Next"/>
+                <a:ea typeface="Hiragino Sans"/>
+                <a:cs typeface="Hiragino Sans"/>
+              </a:defRPr>
+            </a:pPr>
+            <a:r>
+              <a:rPr>
+                <a:ea typeface="Hiragino Sans"/>
+                <a:cs typeface="Hiragino Sans"/>
+              </a:rPr>
+              <a:t>導出 — 動揺方程式はニュートンの運動方程式</a:t>
+            </a:r>
+          </a:p>
+        </p:txBody>
+      </p:sp>
+      <p:pic>
+        <p:nvPicPr>
+          <p:cNvPr id="3" name="Picture 2" descr="ch07_deriv_swing_1.png"/>
+          <p:cNvPicPr>
+            <a:picLocks noChangeAspect="1"/>
+          </p:cNvPicPr>
+          <p:nvPr/>
+        </p:nvPicPr>
+        <p:blipFill>
+          <a:blip r:embed="rId2"/>
+          <a:stretch>
+            <a:fillRect/>
+          </a:stretch>
+        </p:blipFill>
+        <p:spPr>
+          <a:xfrm>
+            <a:off x="437098" y="713232"/>
+            <a:ext cx="11317498" cy="5532120"/>
+          </a:xfrm>
+          <a:prstGeom prst="rect">
+            <a:avLst/>
+          </a:prstGeom>
+        </p:spPr>
+      </p:pic>
+      <p:sp>
+        <p:nvSpPr>
+          <p:cNvPr id="4" name="edge:caption"/>
           <p:cNvSpPr txBox="1"/>
           <p:nvPr/>
         </p:nvSpPr>
         <p:spPr>
           <a:xfrm>
-            <a:off x="822960" y="2676875"/>
-            <a:ext cx="10801807" cy="385762"/>
+            <a:off x="228600" y="6300216"/>
+            <a:ext cx="11734495" cy="310896"/>
           </a:xfrm>
           <a:prstGeom prst="rect">
             <a:avLst/>
@@ -7399,303 +7384,24 @@
           </a:bodyPr>
           <a:lstStyle/>
           <a:p>
-            <a:pPr>
-              <a:lnSpc>
-                <a:spcPct val="130000"/>
-              </a:lnSpc>
-            </a:pPr>
-            <a:r>
-              <a:rPr sz="1500">
-                <a:solidFill>
-                  <a:srgbClr val="33221E"/>
-                </a:solidFill>
-                <a:latin typeface="Avenir Next"/>
-                <a:ea typeface="Hiragino Sans"/>
-                <a:cs typeface="Hiragino Sans"/>
-              </a:rPr>
-              <a:t>慣性モーメント J のロータに、機械トルク T_m と電気トルク T_e がかかる。回転版の F = ma そのもの。</a:t>
-            </a:r>
-          </a:p>
-        </p:txBody>
-      </p:sp>
-      <p:sp>
-        <p:nvSpPr>
-          <p:cNvPr id="5" name="Rectangle 4"/>
-          <p:cNvSpPr/>
-          <p:nvPr/>
-        </p:nvSpPr>
-        <p:spPr>
-          <a:xfrm>
-            <a:off x="566928" y="3214529"/>
-            <a:ext cx="11057839" cy="9525"/>
-          </a:xfrm>
-          <a:prstGeom prst="rect">
-            <a:avLst/>
-          </a:prstGeom>
-          <a:solidFill>
-            <a:srgbClr val="E5DCCE"/>
-          </a:solidFill>
-          <a:ln>
-            <a:noFill/>
-          </a:ln>
-          <a:effectLst/>
-        </p:spPr>
-        <p:style>
-          <a:lnRef idx="1">
-            <a:schemeClr val="accent1"/>
-          </a:lnRef>
-          <a:fillRef idx="3">
-            <a:schemeClr val="accent1"/>
-          </a:fillRef>
-          <a:effectRef idx="2">
-            <a:schemeClr val="accent1"/>
-          </a:effectRef>
-          <a:fontRef idx="minor">
-            <a:schemeClr val="lt1"/>
-          </a:fontRef>
-        </p:style>
-        <p:txBody>
-          <a:bodyPr rtlCol="0" anchor="ctr"/>
-          <a:lstStyle/>
-          <a:p>
             <a:pPr algn="ctr"/>
-          </a:p>
-        </p:txBody>
-      </p:sp>
-      <p:sp>
-        <p:nvSpPr>
-          <p:cNvPr id="6" name="build:ghost"/>
-          <p:cNvSpPr txBox="1"/>
-          <p:nvPr/>
-        </p:nvSpPr>
-        <p:spPr>
-          <a:xfrm>
-            <a:off x="566928" y="3391821"/>
-            <a:ext cx="11057839" cy="254000"/>
-          </a:xfrm>
-          <a:prstGeom prst="rect">
-            <a:avLst/>
-          </a:prstGeom>
-          <a:noFill/>
-        </p:spPr>
-        <p:txBody>
-          <a:bodyPr wrap="none" lIns="0" rIns="0" tIns="0" bIns="0">
-            <a:noAutofit/>
-          </a:bodyPr>
-          <a:lstStyle/>
-          <a:p>
-            <a:r>
-              <a:rPr sz="1600" b="1">
-                <a:solidFill>
-                  <a:srgbClr val="C1C9C5"/>
-                </a:solidFill>
-                <a:latin typeface="Avenir Next"/>
-                <a:ea typeface="Hiragino Sans"/>
-                <a:cs typeface="Hiragino Sans"/>
-              </a:rPr>
-              <a:t>② トルクを電力に｜P = ωT なので両辺を ω で割る</a:t>
-            </a:r>
-          </a:p>
-        </p:txBody>
-      </p:sp>
-      <p:sp>
-        <p:nvSpPr>
-          <p:cNvPr id="7" name="build:ghost"/>
-          <p:cNvSpPr txBox="1"/>
-          <p:nvPr/>
-        </p:nvSpPr>
-        <p:spPr>
-          <a:xfrm>
-            <a:off x="822960" y="3683921"/>
-            <a:ext cx="10801807" cy="385762"/>
-          </a:xfrm>
-          <a:prstGeom prst="rect">
-            <a:avLst/>
-          </a:prstGeom>
-          <a:noFill/>
-        </p:spPr>
-        <p:txBody>
-          <a:bodyPr wrap="square" lIns="0" rIns="0" tIns="0" bIns="0">
-            <a:noAutofit/>
-          </a:bodyPr>
-          <a:lstStyle/>
-          <a:p>
-            <a:pPr>
-              <a:lnSpc>
-                <a:spcPct val="130000"/>
-              </a:lnSpc>
-            </a:pPr>
-            <a:r>
-              <a:rPr sz="1500">
-                <a:solidFill>
-                  <a:srgbClr val="C1BCBB"/>
-                </a:solidFill>
-                <a:latin typeface="Avenir Next"/>
-                <a:ea typeface="Hiragino Sans"/>
-                <a:cs typeface="Hiragino Sans"/>
-              </a:rPr>
-              <a:t>定格速度の近くでは ω ≈ ω₀ とみなせるので、</a:t>
-            </a:r>
-            <a:r>
-              <a:rPr sz="1500" b="1">
-                <a:solidFill>
-                  <a:srgbClr val="C1BCBB"/>
-                </a:solidFill>
-                <a:latin typeface="Avenir Next"/>
-                <a:ea typeface="Hiragino Sans"/>
-                <a:cs typeface="Hiragino Sans"/>
-              </a:rPr>
-              <a:t>(Jω₀) δ'' = P_m − P_e</a:t>
-            </a:r>
-            <a:r>
-              <a:rPr sz="1500">
-                <a:solidFill>
-                  <a:srgbClr val="C1BCBB"/>
-                </a:solidFill>
-                <a:latin typeface="Avenir Next"/>
-                <a:ea typeface="Hiragino Sans"/>
-                <a:cs typeface="Hiragino Sans"/>
-              </a:rPr>
-              <a:t>。角度は電気角の相差角 δ に取り直す。</a:t>
-            </a:r>
-          </a:p>
-        </p:txBody>
-      </p:sp>
-      <p:sp>
-        <p:nvSpPr>
-          <p:cNvPr id="8" name="Rectangle 7"/>
-          <p:cNvSpPr/>
-          <p:nvPr/>
-        </p:nvSpPr>
-        <p:spPr>
-          <a:xfrm>
-            <a:off x="566928" y="4221575"/>
-            <a:ext cx="11057839" cy="9525"/>
-          </a:xfrm>
-          <a:prstGeom prst="rect">
-            <a:avLst/>
-          </a:prstGeom>
-          <a:solidFill>
-            <a:srgbClr val="E5DCCE"/>
-          </a:solidFill>
-          <a:ln>
-            <a:noFill/>
-          </a:ln>
-          <a:effectLst/>
-        </p:spPr>
-        <p:style>
-          <a:lnRef idx="1">
-            <a:schemeClr val="accent1"/>
-          </a:lnRef>
-          <a:fillRef idx="3">
-            <a:schemeClr val="accent1"/>
-          </a:fillRef>
-          <a:effectRef idx="2">
-            <a:schemeClr val="accent1"/>
-          </a:effectRef>
-          <a:fontRef idx="minor">
-            <a:schemeClr val="lt1"/>
-          </a:fontRef>
-        </p:style>
-        <p:txBody>
-          <a:bodyPr rtlCol="0" anchor="ctr"/>
-          <a:lstStyle/>
-          <a:p>
-            <a:pPr algn="ctr"/>
-          </a:p>
-        </p:txBody>
-      </p:sp>
-      <p:sp>
-        <p:nvSpPr>
-          <p:cNvPr id="9" name="build:ghost"/>
-          <p:cNvSpPr txBox="1"/>
-          <p:nvPr/>
-        </p:nvSpPr>
-        <p:spPr>
-          <a:xfrm>
-            <a:off x="566928" y="4398867"/>
-            <a:ext cx="11057839" cy="254000"/>
-          </a:xfrm>
-          <a:prstGeom prst="rect">
-            <a:avLst/>
-          </a:prstGeom>
-          <a:noFill/>
-        </p:spPr>
-        <p:txBody>
-          <a:bodyPr wrap="none" lIns="0" rIns="0" tIns="0" bIns="0">
-            <a:noAutofit/>
-          </a:bodyPr>
-          <a:lstStyle/>
-          <a:p>
-            <a:r>
-              <a:rPr sz="1600" b="1">
-                <a:solidFill>
-                  <a:srgbClr val="C1C9C5"/>
-                </a:solidFill>
-                <a:latin typeface="Avenir Next"/>
-                <a:ea typeface="Hiragino Sans"/>
-                <a:cs typeface="Hiragino Sans"/>
-              </a:rPr>
-              <a:t>③ 単位法へ｜定格容量で割り、H = (½Jω₀²)/S_rated を使う</a:t>
-            </a:r>
-          </a:p>
-        </p:txBody>
-      </p:sp>
-      <p:sp>
-        <p:nvSpPr>
-          <p:cNvPr id="10" name="build:ghost"/>
-          <p:cNvSpPr txBox="1"/>
-          <p:nvPr/>
-        </p:nvSpPr>
-        <p:spPr>
-          <a:xfrm>
-            <a:off x="822960" y="4690967"/>
-            <a:ext cx="10801807" cy="385762"/>
-          </a:xfrm>
-          <a:prstGeom prst="rect">
-            <a:avLst/>
-          </a:prstGeom>
-          <a:noFill/>
-        </p:spPr>
-        <p:txBody>
-          <a:bodyPr wrap="square" lIns="0" rIns="0" tIns="0" bIns="0">
-            <a:noAutofit/>
-          </a:bodyPr>
-          <a:lstStyle/>
-          <a:p>
-            <a:pPr>
-              <a:lnSpc>
-                <a:spcPct val="130000"/>
-              </a:lnSpc>
-            </a:pPr>
-            <a:r>
-              <a:rPr sz="1500" b="1">
-                <a:solidFill>
-                  <a:srgbClr val="C1BCBB"/>
-                </a:solidFill>
-                <a:latin typeface="Avenir Next"/>
-                <a:ea typeface="Hiragino Sans"/>
-                <a:cs typeface="Hiragino Sans"/>
-              </a:rPr>
-              <a:t>(2H/ω₀) δ'' = P_m − P_e</a:t>
-            </a:r>
-            <a:r>
-              <a:rPr sz="1500">
-                <a:solidFill>
-                  <a:srgbClr val="C1BCBB"/>
-                </a:solidFill>
-                <a:latin typeface="Avenir Next"/>
-                <a:ea typeface="Hiragino Sans"/>
-                <a:cs typeface="Hiragino Sans"/>
-              </a:rPr>
-              <a:t>。教科書の M = 2H/ω₀ はこの係数。H は「定格出力で何秒回り続けられるか」で、単位は秒。</a:t>
-            </a:r>
-          </a:p>
-        </p:txBody>
-      </p:sp>
-      <p:sp>
-        <p:nvSpPr>
-          <p:cNvPr id="11" name="TextBox 10"/>
+            <a:r>
+              <a:rPr sz="1400">
+                <a:solidFill>
+                  <a:srgbClr val="71635B"/>
+                </a:solidFill>
+                <a:latin typeface="Avenir Next"/>
+                <a:ea typeface="Hiragino Sans"/>
+                <a:cs typeface="Hiragino Sans"/>
+              </a:rPr>
+              <a:t>慣性モーメント J のロータに、機械トルク T_m と電気トルク T_e がかかる。回転版の F = ma そのもの。　出典｜コード/fig_ch07.py</a:t>
+            </a:r>
+          </a:p>
+        </p:txBody>
+      </p:sp>
+      <p:sp>
+        <p:nvSpPr>
+          <p:cNvPr id="5" name="TextBox 4"/>
           <p:cNvSpPr txBox="1"/>
           <p:nvPr/>
         </p:nvSpPr>
@@ -7751,59 +7457,14 @@
       <p:grpSpPr/>
       <p:sp>
         <p:nvSpPr>
-          <p:cNvPr id="2" name="TextBox 1"/>
+          <p:cNvPr id="2" name="edge:title"/>
           <p:cNvSpPr txBox="1"/>
           <p:nvPr/>
         </p:nvSpPr>
         <p:spPr>
           <a:xfrm>
-            <a:off x="566928" y="457200"/>
-            <a:ext cx="11057839" cy="658368"/>
-          </a:xfrm>
-          <a:prstGeom prst="rect">
-            <a:avLst/>
-          </a:prstGeom>
-          <a:noFill/>
-        </p:spPr>
-        <p:txBody>
-          <a:bodyPr wrap="square" lIns="0" rIns="0" tIns="0" bIns="0" anchor="ctr">
-            <a:noAutofit/>
-          </a:bodyPr>
-          <a:lstStyle/>
-          <a:p>
-            <a:pPr>
-              <a:lnSpc>
-                <a:spcPct val="106000"/>
-              </a:lnSpc>
-              <a:defRPr sz="3390" b="1">
-                <a:solidFill>
-                  <a:srgbClr val="7C332A"/>
-                </a:solidFill>
-                <a:latin typeface="Avenir Next"/>
-                <a:ea typeface="Hiragino Sans"/>
-                <a:cs typeface="Hiragino Sans"/>
-              </a:defRPr>
-            </a:pPr>
-            <a:r>
-              <a:rPr>
-                <a:ea typeface="Hiragino Sans"/>
-                <a:cs typeface="Hiragino Sans"/>
-              </a:rPr>
-              <a:t>導出 — 動揺方程式はニュートンの運動方程式</a:t>
-            </a:r>
-          </a:p>
-        </p:txBody>
-      </p:sp>
-      <p:sp>
-        <p:nvSpPr>
-          <p:cNvPr id="3" name="TextBox 2"/>
-          <p:cNvSpPr txBox="1"/>
-          <p:nvPr/>
-        </p:nvSpPr>
-        <p:spPr>
-          <a:xfrm>
-            <a:off x="566928" y="2384775"/>
-            <a:ext cx="11057839" cy="254000"/>
+            <a:off x="566928" y="146304"/>
+            <a:ext cx="11057839" cy="457200"/>
           </a:xfrm>
           <a:prstGeom prst="rect">
             <a:avLst/>
@@ -7816,30 +7477,60 @@
           </a:bodyPr>
           <a:lstStyle/>
           <a:p>
-            <a:r>
-              <a:rPr sz="1600" b="1">
-                <a:solidFill>
-                  <a:srgbClr val="5C7268"/>
-                </a:solidFill>
-                <a:latin typeface="Avenir Next"/>
-                <a:ea typeface="Hiragino Sans"/>
-                <a:cs typeface="Hiragino Sans"/>
-              </a:rPr>
-              <a:t>① 回転体の運動方程式｜J θ'' = T_m − T_e</a:t>
-            </a:r>
-          </a:p>
-        </p:txBody>
-      </p:sp>
-      <p:sp>
-        <p:nvSpPr>
-          <p:cNvPr id="4" name="TextBox 3"/>
+            <a:pPr>
+              <a:defRPr sz="2400" b="1">
+                <a:solidFill>
+                  <a:srgbClr val="7C332A"/>
+                </a:solidFill>
+                <a:latin typeface="Avenir Next"/>
+                <a:ea typeface="Hiragino Sans"/>
+                <a:cs typeface="Hiragino Sans"/>
+              </a:defRPr>
+            </a:pPr>
+            <a:r>
+              <a:rPr>
+                <a:ea typeface="Hiragino Sans"/>
+                <a:cs typeface="Hiragino Sans"/>
+              </a:rPr>
+              <a:t>導出 — 動揺方程式はニュートンの運動方程式</a:t>
+            </a:r>
+          </a:p>
+        </p:txBody>
+      </p:sp>
+      <p:pic>
+        <p:nvPicPr>
+          <p:cNvPr id="3" name="Picture 2" descr="ch07_deriv_swing_2.png"/>
+          <p:cNvPicPr>
+            <a:picLocks noChangeAspect="1"/>
+          </p:cNvPicPr>
+          <p:nvPr/>
+        </p:nvPicPr>
+        <p:blipFill>
+          <a:blip r:embed="rId2"/>
+          <a:stretch>
+            <a:fillRect/>
+          </a:stretch>
+        </p:blipFill>
+        <p:spPr>
+          <a:xfrm>
+            <a:off x="437098" y="713232"/>
+            <a:ext cx="11317498" cy="5532120"/>
+          </a:xfrm>
+          <a:prstGeom prst="rect">
+            <a:avLst/>
+          </a:prstGeom>
+        </p:spPr>
+      </p:pic>
+      <p:sp>
+        <p:nvSpPr>
+          <p:cNvPr id="4" name="edge:caption"/>
           <p:cNvSpPr txBox="1"/>
           <p:nvPr/>
         </p:nvSpPr>
         <p:spPr>
           <a:xfrm>
-            <a:off x="822960" y="2676875"/>
-            <a:ext cx="10801807" cy="385762"/>
+            <a:off x="228600" y="6300216"/>
+            <a:ext cx="11734495" cy="310896"/>
           </a:xfrm>
           <a:prstGeom prst="rect">
             <a:avLst/>
@@ -7852,303 +7543,24 @@
           </a:bodyPr>
           <a:lstStyle/>
           <a:p>
-            <a:pPr>
-              <a:lnSpc>
-                <a:spcPct val="130000"/>
-              </a:lnSpc>
-            </a:pPr>
-            <a:r>
-              <a:rPr sz="1500">
-                <a:solidFill>
-                  <a:srgbClr val="33221E"/>
-                </a:solidFill>
-                <a:latin typeface="Avenir Next"/>
-                <a:ea typeface="Hiragino Sans"/>
-                <a:cs typeface="Hiragino Sans"/>
-              </a:rPr>
-              <a:t>慣性モーメント J のロータに、機械トルク T_m と電気トルク T_e がかかる。回転版の F = ma そのもの。</a:t>
-            </a:r>
-          </a:p>
-        </p:txBody>
-      </p:sp>
-      <p:sp>
-        <p:nvSpPr>
-          <p:cNvPr id="5" name="Rectangle 4"/>
-          <p:cNvSpPr/>
-          <p:nvPr/>
-        </p:nvSpPr>
-        <p:spPr>
-          <a:xfrm>
-            <a:off x="566928" y="3214529"/>
-            <a:ext cx="11057839" cy="9525"/>
-          </a:xfrm>
-          <a:prstGeom prst="rect">
-            <a:avLst/>
-          </a:prstGeom>
-          <a:solidFill>
-            <a:srgbClr val="E5DCCE"/>
-          </a:solidFill>
-          <a:ln>
-            <a:noFill/>
-          </a:ln>
-          <a:effectLst/>
-        </p:spPr>
-        <p:style>
-          <a:lnRef idx="1">
-            <a:schemeClr val="accent1"/>
-          </a:lnRef>
-          <a:fillRef idx="3">
-            <a:schemeClr val="accent1"/>
-          </a:fillRef>
-          <a:effectRef idx="2">
-            <a:schemeClr val="accent1"/>
-          </a:effectRef>
-          <a:fontRef idx="minor">
-            <a:schemeClr val="lt1"/>
-          </a:fontRef>
-        </p:style>
-        <p:txBody>
-          <a:bodyPr rtlCol="0" anchor="ctr"/>
-          <a:lstStyle/>
-          <a:p>
             <a:pPr algn="ctr"/>
-          </a:p>
-        </p:txBody>
-      </p:sp>
-      <p:sp>
-        <p:nvSpPr>
-          <p:cNvPr id="6" name="TextBox 5"/>
-          <p:cNvSpPr txBox="1"/>
-          <p:nvPr/>
-        </p:nvSpPr>
-        <p:spPr>
-          <a:xfrm>
-            <a:off x="566928" y="3391821"/>
-            <a:ext cx="11057839" cy="254000"/>
-          </a:xfrm>
-          <a:prstGeom prst="rect">
-            <a:avLst/>
-          </a:prstGeom>
-          <a:noFill/>
-        </p:spPr>
-        <p:txBody>
-          <a:bodyPr wrap="none" lIns="0" rIns="0" tIns="0" bIns="0">
-            <a:noAutofit/>
-          </a:bodyPr>
-          <a:lstStyle/>
-          <a:p>
-            <a:r>
-              <a:rPr sz="1600" b="1">
-                <a:solidFill>
-                  <a:srgbClr val="5C7268"/>
-                </a:solidFill>
-                <a:latin typeface="Avenir Next"/>
-                <a:ea typeface="Hiragino Sans"/>
-                <a:cs typeface="Hiragino Sans"/>
-              </a:rPr>
-              <a:t>② トルクを電力に｜P = ωT なので両辺を ω で割る</a:t>
-            </a:r>
-          </a:p>
-        </p:txBody>
-      </p:sp>
-      <p:sp>
-        <p:nvSpPr>
-          <p:cNvPr id="7" name="TextBox 6"/>
-          <p:cNvSpPr txBox="1"/>
-          <p:nvPr/>
-        </p:nvSpPr>
-        <p:spPr>
-          <a:xfrm>
-            <a:off x="822960" y="3683921"/>
-            <a:ext cx="10801807" cy="385762"/>
-          </a:xfrm>
-          <a:prstGeom prst="rect">
-            <a:avLst/>
-          </a:prstGeom>
-          <a:noFill/>
-        </p:spPr>
-        <p:txBody>
-          <a:bodyPr wrap="square" lIns="0" rIns="0" tIns="0" bIns="0">
-            <a:noAutofit/>
-          </a:bodyPr>
-          <a:lstStyle/>
-          <a:p>
-            <a:pPr>
-              <a:lnSpc>
-                <a:spcPct val="130000"/>
-              </a:lnSpc>
-            </a:pPr>
-            <a:r>
-              <a:rPr sz="1500">
-                <a:solidFill>
-                  <a:srgbClr val="33221E"/>
-                </a:solidFill>
-                <a:latin typeface="Avenir Next"/>
-                <a:ea typeface="Hiragino Sans"/>
-                <a:cs typeface="Hiragino Sans"/>
-              </a:rPr>
-              <a:t>定格速度の近くでは ω ≈ ω₀ とみなせるので、</a:t>
-            </a:r>
-            <a:r>
-              <a:rPr sz="1500" b="1">
-                <a:solidFill>
-                  <a:srgbClr val="33221E"/>
-                </a:solidFill>
-                <a:latin typeface="Avenir Next"/>
-                <a:ea typeface="Hiragino Sans"/>
-                <a:cs typeface="Hiragino Sans"/>
-              </a:rPr>
-              <a:t>(Jω₀) δ'' = P_m − P_e</a:t>
-            </a:r>
-            <a:r>
-              <a:rPr sz="1500">
-                <a:solidFill>
-                  <a:srgbClr val="33221E"/>
-                </a:solidFill>
-                <a:latin typeface="Avenir Next"/>
-                <a:ea typeface="Hiragino Sans"/>
-                <a:cs typeface="Hiragino Sans"/>
-              </a:rPr>
-              <a:t>。角度は電気角の相差角 δ に取り直す。</a:t>
-            </a:r>
-          </a:p>
-        </p:txBody>
-      </p:sp>
-      <p:sp>
-        <p:nvSpPr>
-          <p:cNvPr id="8" name="Rectangle 7"/>
-          <p:cNvSpPr/>
-          <p:nvPr/>
-        </p:nvSpPr>
-        <p:spPr>
-          <a:xfrm>
-            <a:off x="566928" y="4221575"/>
-            <a:ext cx="11057839" cy="9525"/>
-          </a:xfrm>
-          <a:prstGeom prst="rect">
-            <a:avLst/>
-          </a:prstGeom>
-          <a:solidFill>
-            <a:srgbClr val="E5DCCE"/>
-          </a:solidFill>
-          <a:ln>
-            <a:noFill/>
-          </a:ln>
-          <a:effectLst/>
-        </p:spPr>
-        <p:style>
-          <a:lnRef idx="1">
-            <a:schemeClr val="accent1"/>
-          </a:lnRef>
-          <a:fillRef idx="3">
-            <a:schemeClr val="accent1"/>
-          </a:fillRef>
-          <a:effectRef idx="2">
-            <a:schemeClr val="accent1"/>
-          </a:effectRef>
-          <a:fontRef idx="minor">
-            <a:schemeClr val="lt1"/>
-          </a:fontRef>
-        </p:style>
-        <p:txBody>
-          <a:bodyPr rtlCol="0" anchor="ctr"/>
-          <a:lstStyle/>
-          <a:p>
-            <a:pPr algn="ctr"/>
-          </a:p>
-        </p:txBody>
-      </p:sp>
-      <p:sp>
-        <p:nvSpPr>
-          <p:cNvPr id="9" name="build:ghost"/>
-          <p:cNvSpPr txBox="1"/>
-          <p:nvPr/>
-        </p:nvSpPr>
-        <p:spPr>
-          <a:xfrm>
-            <a:off x="566928" y="4398867"/>
-            <a:ext cx="11057839" cy="254000"/>
-          </a:xfrm>
-          <a:prstGeom prst="rect">
-            <a:avLst/>
-          </a:prstGeom>
-          <a:noFill/>
-        </p:spPr>
-        <p:txBody>
-          <a:bodyPr wrap="none" lIns="0" rIns="0" tIns="0" bIns="0">
-            <a:noAutofit/>
-          </a:bodyPr>
-          <a:lstStyle/>
-          <a:p>
-            <a:r>
-              <a:rPr sz="1600" b="1">
-                <a:solidFill>
-                  <a:srgbClr val="C1C9C5"/>
-                </a:solidFill>
-                <a:latin typeface="Avenir Next"/>
-                <a:ea typeface="Hiragino Sans"/>
-                <a:cs typeface="Hiragino Sans"/>
-              </a:rPr>
-              <a:t>③ 単位法へ｜定格容量で割り、H = (½Jω₀²)/S_rated を使う</a:t>
-            </a:r>
-          </a:p>
-        </p:txBody>
-      </p:sp>
-      <p:sp>
-        <p:nvSpPr>
-          <p:cNvPr id="10" name="build:ghost"/>
-          <p:cNvSpPr txBox="1"/>
-          <p:nvPr/>
-        </p:nvSpPr>
-        <p:spPr>
-          <a:xfrm>
-            <a:off x="822960" y="4690967"/>
-            <a:ext cx="10801807" cy="385762"/>
-          </a:xfrm>
-          <a:prstGeom prst="rect">
-            <a:avLst/>
-          </a:prstGeom>
-          <a:noFill/>
-        </p:spPr>
-        <p:txBody>
-          <a:bodyPr wrap="square" lIns="0" rIns="0" tIns="0" bIns="0">
-            <a:noAutofit/>
-          </a:bodyPr>
-          <a:lstStyle/>
-          <a:p>
-            <a:pPr>
-              <a:lnSpc>
-                <a:spcPct val="130000"/>
-              </a:lnSpc>
-            </a:pPr>
-            <a:r>
-              <a:rPr sz="1500" b="1">
-                <a:solidFill>
-                  <a:srgbClr val="C1BCBB"/>
-                </a:solidFill>
-                <a:latin typeface="Avenir Next"/>
-                <a:ea typeface="Hiragino Sans"/>
-                <a:cs typeface="Hiragino Sans"/>
-              </a:rPr>
-              <a:t>(2H/ω₀) δ'' = P_m − P_e</a:t>
-            </a:r>
-            <a:r>
-              <a:rPr sz="1500">
-                <a:solidFill>
-                  <a:srgbClr val="C1BCBB"/>
-                </a:solidFill>
-                <a:latin typeface="Avenir Next"/>
-                <a:ea typeface="Hiragino Sans"/>
-                <a:cs typeface="Hiragino Sans"/>
-              </a:rPr>
-              <a:t>。教科書の M = 2H/ω₀ はこの係数。H は「定格出力で何秒回り続けられるか」で、単位は秒。</a:t>
-            </a:r>
-          </a:p>
-        </p:txBody>
-      </p:sp>
-      <p:sp>
-        <p:nvSpPr>
-          <p:cNvPr id="11" name="TextBox 10"/>
+            <a:r>
+              <a:rPr sz="1400">
+                <a:solidFill>
+                  <a:srgbClr val="71635B"/>
+                </a:solidFill>
+                <a:latin typeface="Avenir Next"/>
+                <a:ea typeface="Hiragino Sans"/>
+                <a:cs typeface="Hiragino Sans"/>
+              </a:rPr>
+              <a:t>定格速度の近くでは ω ≈ ω₀ とみなせるので、(Jω₀) δ'' = P_m − P_e。角度は電気角の相差角 δ に取り直す。　出典｜コード/fig_ch07.py</a:t>
+            </a:r>
+          </a:p>
+        </p:txBody>
+      </p:sp>
+      <p:sp>
+        <p:nvSpPr>
+          <p:cNvPr id="5" name="TextBox 4"/>
           <p:cNvSpPr txBox="1"/>
           <p:nvPr/>
         </p:nvSpPr>
@@ -8204,59 +7616,14 @@
       <p:grpSpPr/>
       <p:sp>
         <p:nvSpPr>
-          <p:cNvPr id="2" name="TextBox 1"/>
+          <p:cNvPr id="2" name="edge:title"/>
           <p:cNvSpPr txBox="1"/>
           <p:nvPr/>
         </p:nvSpPr>
         <p:spPr>
           <a:xfrm>
-            <a:off x="566928" y="457200"/>
-            <a:ext cx="11057839" cy="658368"/>
-          </a:xfrm>
-          <a:prstGeom prst="rect">
-            <a:avLst/>
-          </a:prstGeom>
-          <a:noFill/>
-        </p:spPr>
-        <p:txBody>
-          <a:bodyPr wrap="square" lIns="0" rIns="0" tIns="0" bIns="0" anchor="ctr">
-            <a:noAutofit/>
-          </a:bodyPr>
-          <a:lstStyle/>
-          <a:p>
-            <a:pPr>
-              <a:lnSpc>
-                <a:spcPct val="106000"/>
-              </a:lnSpc>
-              <a:defRPr sz="3390" b="1">
-                <a:solidFill>
-                  <a:srgbClr val="7C332A"/>
-                </a:solidFill>
-                <a:latin typeface="Avenir Next"/>
-                <a:ea typeface="Hiragino Sans"/>
-                <a:cs typeface="Hiragino Sans"/>
-              </a:defRPr>
-            </a:pPr>
-            <a:r>
-              <a:rPr>
-                <a:ea typeface="Hiragino Sans"/>
-                <a:cs typeface="Hiragino Sans"/>
-              </a:rPr>
-              <a:t>導出 — 動揺方程式はニュートンの運動方程式</a:t>
-            </a:r>
-          </a:p>
-        </p:txBody>
-      </p:sp>
-      <p:sp>
-        <p:nvSpPr>
-          <p:cNvPr id="3" name="TextBox 2"/>
-          <p:cNvSpPr txBox="1"/>
-          <p:nvPr/>
-        </p:nvSpPr>
-        <p:spPr>
-          <a:xfrm>
-            <a:off x="566928" y="2384775"/>
-            <a:ext cx="11057839" cy="254000"/>
+            <a:off x="566928" y="146304"/>
+            <a:ext cx="11057839" cy="457200"/>
           </a:xfrm>
           <a:prstGeom prst="rect">
             <a:avLst/>
@@ -8269,30 +7636,60 @@
           </a:bodyPr>
           <a:lstStyle/>
           <a:p>
-            <a:r>
-              <a:rPr sz="1600" b="1">
-                <a:solidFill>
-                  <a:srgbClr val="5C7268"/>
-                </a:solidFill>
-                <a:latin typeface="Avenir Next"/>
-                <a:ea typeface="Hiragino Sans"/>
-                <a:cs typeface="Hiragino Sans"/>
-              </a:rPr>
-              <a:t>① 回転体の運動方程式｜J θ'' = T_m − T_e</a:t>
-            </a:r>
-          </a:p>
-        </p:txBody>
-      </p:sp>
-      <p:sp>
-        <p:nvSpPr>
-          <p:cNvPr id="4" name="TextBox 3"/>
+            <a:pPr>
+              <a:defRPr sz="2400" b="1">
+                <a:solidFill>
+                  <a:srgbClr val="7C332A"/>
+                </a:solidFill>
+                <a:latin typeface="Avenir Next"/>
+                <a:ea typeface="Hiragino Sans"/>
+                <a:cs typeface="Hiragino Sans"/>
+              </a:defRPr>
+            </a:pPr>
+            <a:r>
+              <a:rPr>
+                <a:ea typeface="Hiragino Sans"/>
+                <a:cs typeface="Hiragino Sans"/>
+              </a:rPr>
+              <a:t>導出 — 動揺方程式はニュートンの運動方程式</a:t>
+            </a:r>
+          </a:p>
+        </p:txBody>
+      </p:sp>
+      <p:pic>
+        <p:nvPicPr>
+          <p:cNvPr id="3" name="Picture 2" descr="ch07_deriv_swing_3.png"/>
+          <p:cNvPicPr>
+            <a:picLocks noChangeAspect="1"/>
+          </p:cNvPicPr>
+          <p:nvPr/>
+        </p:nvPicPr>
+        <p:blipFill>
+          <a:blip r:embed="rId2"/>
+          <a:stretch>
+            <a:fillRect/>
+          </a:stretch>
+        </p:blipFill>
+        <p:spPr>
+          <a:xfrm>
+            <a:off x="651705" y="713232"/>
+            <a:ext cx="10888285" cy="5322316"/>
+          </a:xfrm>
+          <a:prstGeom prst="rect">
+            <a:avLst/>
+          </a:prstGeom>
+        </p:spPr>
+      </p:pic>
+      <p:sp>
+        <p:nvSpPr>
+          <p:cNvPr id="4" name="edge:caption"/>
           <p:cNvSpPr txBox="1"/>
           <p:nvPr/>
         </p:nvSpPr>
         <p:spPr>
           <a:xfrm>
-            <a:off x="822960" y="2676875"/>
-            <a:ext cx="10801807" cy="385762"/>
+            <a:off x="228600" y="6090412"/>
+            <a:ext cx="11734495" cy="520700"/>
           </a:xfrm>
           <a:prstGeom prst="rect">
             <a:avLst/>
@@ -8305,303 +7702,24 @@
           </a:bodyPr>
           <a:lstStyle/>
           <a:p>
-            <a:pPr>
-              <a:lnSpc>
-                <a:spcPct val="130000"/>
-              </a:lnSpc>
-            </a:pPr>
-            <a:r>
-              <a:rPr sz="1500">
-                <a:solidFill>
-                  <a:srgbClr val="33221E"/>
-                </a:solidFill>
-                <a:latin typeface="Avenir Next"/>
-                <a:ea typeface="Hiragino Sans"/>
-                <a:cs typeface="Hiragino Sans"/>
-              </a:rPr>
-              <a:t>慣性モーメント J のロータに、機械トルク T_m と電気トルク T_e がかかる。回転版の F = ma そのもの。</a:t>
-            </a:r>
-          </a:p>
-        </p:txBody>
-      </p:sp>
-      <p:sp>
-        <p:nvSpPr>
-          <p:cNvPr id="5" name="Rectangle 4"/>
-          <p:cNvSpPr/>
-          <p:nvPr/>
-        </p:nvSpPr>
-        <p:spPr>
-          <a:xfrm>
-            <a:off x="566928" y="3214529"/>
-            <a:ext cx="11057839" cy="9525"/>
-          </a:xfrm>
-          <a:prstGeom prst="rect">
-            <a:avLst/>
-          </a:prstGeom>
-          <a:solidFill>
-            <a:srgbClr val="E5DCCE"/>
-          </a:solidFill>
-          <a:ln>
-            <a:noFill/>
-          </a:ln>
-          <a:effectLst/>
-        </p:spPr>
-        <p:style>
-          <a:lnRef idx="1">
-            <a:schemeClr val="accent1"/>
-          </a:lnRef>
-          <a:fillRef idx="3">
-            <a:schemeClr val="accent1"/>
-          </a:fillRef>
-          <a:effectRef idx="2">
-            <a:schemeClr val="accent1"/>
-          </a:effectRef>
-          <a:fontRef idx="minor">
-            <a:schemeClr val="lt1"/>
-          </a:fontRef>
-        </p:style>
-        <p:txBody>
-          <a:bodyPr rtlCol="0" anchor="ctr"/>
-          <a:lstStyle/>
-          <a:p>
             <a:pPr algn="ctr"/>
-          </a:p>
-        </p:txBody>
-      </p:sp>
-      <p:sp>
-        <p:nvSpPr>
-          <p:cNvPr id="6" name="TextBox 5"/>
-          <p:cNvSpPr txBox="1"/>
-          <p:nvPr/>
-        </p:nvSpPr>
-        <p:spPr>
-          <a:xfrm>
-            <a:off x="566928" y="3391821"/>
-            <a:ext cx="11057839" cy="254000"/>
-          </a:xfrm>
-          <a:prstGeom prst="rect">
-            <a:avLst/>
-          </a:prstGeom>
-          <a:noFill/>
-        </p:spPr>
-        <p:txBody>
-          <a:bodyPr wrap="none" lIns="0" rIns="0" tIns="0" bIns="0">
-            <a:noAutofit/>
-          </a:bodyPr>
-          <a:lstStyle/>
-          <a:p>
-            <a:r>
-              <a:rPr sz="1600" b="1">
-                <a:solidFill>
-                  <a:srgbClr val="5C7268"/>
-                </a:solidFill>
-                <a:latin typeface="Avenir Next"/>
-                <a:ea typeface="Hiragino Sans"/>
-                <a:cs typeface="Hiragino Sans"/>
-              </a:rPr>
-              <a:t>② トルクを電力に｜P = ωT なので両辺を ω で割る</a:t>
-            </a:r>
-          </a:p>
-        </p:txBody>
-      </p:sp>
-      <p:sp>
-        <p:nvSpPr>
-          <p:cNvPr id="7" name="TextBox 6"/>
-          <p:cNvSpPr txBox="1"/>
-          <p:nvPr/>
-        </p:nvSpPr>
-        <p:spPr>
-          <a:xfrm>
-            <a:off x="822960" y="3683921"/>
-            <a:ext cx="10801807" cy="385762"/>
-          </a:xfrm>
-          <a:prstGeom prst="rect">
-            <a:avLst/>
-          </a:prstGeom>
-          <a:noFill/>
-        </p:spPr>
-        <p:txBody>
-          <a:bodyPr wrap="square" lIns="0" rIns="0" tIns="0" bIns="0">
-            <a:noAutofit/>
-          </a:bodyPr>
-          <a:lstStyle/>
-          <a:p>
-            <a:pPr>
-              <a:lnSpc>
-                <a:spcPct val="130000"/>
-              </a:lnSpc>
-            </a:pPr>
-            <a:r>
-              <a:rPr sz="1500">
-                <a:solidFill>
-                  <a:srgbClr val="33221E"/>
-                </a:solidFill>
-                <a:latin typeface="Avenir Next"/>
-                <a:ea typeface="Hiragino Sans"/>
-                <a:cs typeface="Hiragino Sans"/>
-              </a:rPr>
-              <a:t>定格速度の近くでは ω ≈ ω₀ とみなせるので、</a:t>
-            </a:r>
-            <a:r>
-              <a:rPr sz="1500" b="1">
-                <a:solidFill>
-                  <a:srgbClr val="33221E"/>
-                </a:solidFill>
-                <a:latin typeface="Avenir Next"/>
-                <a:ea typeface="Hiragino Sans"/>
-                <a:cs typeface="Hiragino Sans"/>
-              </a:rPr>
-              <a:t>(Jω₀) δ'' = P_m − P_e</a:t>
-            </a:r>
-            <a:r>
-              <a:rPr sz="1500">
-                <a:solidFill>
-                  <a:srgbClr val="33221E"/>
-                </a:solidFill>
-                <a:latin typeface="Avenir Next"/>
-                <a:ea typeface="Hiragino Sans"/>
-                <a:cs typeface="Hiragino Sans"/>
-              </a:rPr>
-              <a:t>。角度は電気角の相差角 δ に取り直す。</a:t>
-            </a:r>
-          </a:p>
-        </p:txBody>
-      </p:sp>
-      <p:sp>
-        <p:nvSpPr>
-          <p:cNvPr id="8" name="Rectangle 7"/>
-          <p:cNvSpPr/>
-          <p:nvPr/>
-        </p:nvSpPr>
-        <p:spPr>
-          <a:xfrm>
-            <a:off x="566928" y="4221575"/>
-            <a:ext cx="11057839" cy="9525"/>
-          </a:xfrm>
-          <a:prstGeom prst="rect">
-            <a:avLst/>
-          </a:prstGeom>
-          <a:solidFill>
-            <a:srgbClr val="E5DCCE"/>
-          </a:solidFill>
-          <a:ln>
-            <a:noFill/>
-          </a:ln>
-          <a:effectLst/>
-        </p:spPr>
-        <p:style>
-          <a:lnRef idx="1">
-            <a:schemeClr val="accent1"/>
-          </a:lnRef>
-          <a:fillRef idx="3">
-            <a:schemeClr val="accent1"/>
-          </a:fillRef>
-          <a:effectRef idx="2">
-            <a:schemeClr val="accent1"/>
-          </a:effectRef>
-          <a:fontRef idx="minor">
-            <a:schemeClr val="lt1"/>
-          </a:fontRef>
-        </p:style>
-        <p:txBody>
-          <a:bodyPr rtlCol="0" anchor="ctr"/>
-          <a:lstStyle/>
-          <a:p>
-            <a:pPr algn="ctr"/>
-          </a:p>
-        </p:txBody>
-      </p:sp>
-      <p:sp>
-        <p:nvSpPr>
-          <p:cNvPr id="9" name="TextBox 8"/>
-          <p:cNvSpPr txBox="1"/>
-          <p:nvPr/>
-        </p:nvSpPr>
-        <p:spPr>
-          <a:xfrm>
-            <a:off x="566928" y="4398867"/>
-            <a:ext cx="11057839" cy="254000"/>
-          </a:xfrm>
-          <a:prstGeom prst="rect">
-            <a:avLst/>
-          </a:prstGeom>
-          <a:noFill/>
-        </p:spPr>
-        <p:txBody>
-          <a:bodyPr wrap="none" lIns="0" rIns="0" tIns="0" bIns="0">
-            <a:noAutofit/>
-          </a:bodyPr>
-          <a:lstStyle/>
-          <a:p>
-            <a:r>
-              <a:rPr sz="1600" b="1">
-                <a:solidFill>
-                  <a:srgbClr val="5C7268"/>
-                </a:solidFill>
-                <a:latin typeface="Avenir Next"/>
-                <a:ea typeface="Hiragino Sans"/>
-                <a:cs typeface="Hiragino Sans"/>
-              </a:rPr>
-              <a:t>③ 単位法へ｜定格容量で割り、H = (½Jω₀²)/S_rated を使う</a:t>
-            </a:r>
-          </a:p>
-        </p:txBody>
-      </p:sp>
-      <p:sp>
-        <p:nvSpPr>
-          <p:cNvPr id="10" name="TextBox 9"/>
-          <p:cNvSpPr txBox="1"/>
-          <p:nvPr/>
-        </p:nvSpPr>
-        <p:spPr>
-          <a:xfrm>
-            <a:off x="822960" y="4690967"/>
-            <a:ext cx="10801807" cy="385762"/>
-          </a:xfrm>
-          <a:prstGeom prst="rect">
-            <a:avLst/>
-          </a:prstGeom>
-          <a:noFill/>
-        </p:spPr>
-        <p:txBody>
-          <a:bodyPr wrap="square" lIns="0" rIns="0" tIns="0" bIns="0">
-            <a:noAutofit/>
-          </a:bodyPr>
-          <a:lstStyle/>
-          <a:p>
-            <a:pPr>
-              <a:lnSpc>
-                <a:spcPct val="130000"/>
-              </a:lnSpc>
-            </a:pPr>
-            <a:r>
-              <a:rPr sz="1500" b="1">
-                <a:solidFill>
-                  <a:srgbClr val="33221E"/>
-                </a:solidFill>
-                <a:latin typeface="Avenir Next"/>
-                <a:ea typeface="Hiragino Sans"/>
-                <a:cs typeface="Hiragino Sans"/>
-              </a:rPr>
-              <a:t>(2H/ω₀) δ'' = P_m − P_e</a:t>
-            </a:r>
-            <a:r>
-              <a:rPr sz="1500">
-                <a:solidFill>
-                  <a:srgbClr val="33221E"/>
-                </a:solidFill>
-                <a:latin typeface="Avenir Next"/>
-                <a:ea typeface="Hiragino Sans"/>
-                <a:cs typeface="Hiragino Sans"/>
-              </a:rPr>
-              <a:t>。教科書の M = 2H/ω₀ はこの係数。H は「定格出力で何秒回り続けられるか」で、単位は秒。</a:t>
-            </a:r>
-          </a:p>
-        </p:txBody>
-      </p:sp>
-      <p:sp>
-        <p:nvSpPr>
-          <p:cNvPr id="11" name="TextBox 10"/>
+            <a:r>
+              <a:rPr sz="1400">
+                <a:solidFill>
+                  <a:srgbClr val="71635B"/>
+                </a:solidFill>
+                <a:latin typeface="Avenir Next"/>
+                <a:ea typeface="Hiragino Sans"/>
+                <a:cs typeface="Hiragino Sans"/>
+              </a:rPr>
+              <a:t>(2H/ω₀) δ'' = P_m − P_e。教科書の M = 2H/ω₀ はこの係数。H は「定格出力で何秒回り続けられるか」で、単位は秒。　出典｜コード/fig_ch07.py</a:t>
+            </a:r>
+          </a:p>
+        </p:txBody>
+      </p:sp>
+      <p:sp>
+        <p:nvSpPr>
+          <p:cNvPr id="5" name="TextBox 4"/>
           <p:cNvSpPr txBox="1"/>
           <p:nvPr/>
         </p:nvSpPr>
@@ -10092,59 +9210,14 @@
       <p:grpSpPr/>
       <p:sp>
         <p:nvSpPr>
-          <p:cNvPr id="2" name="TextBox 1"/>
+          <p:cNvPr id="2" name="edge:title"/>
           <p:cNvSpPr txBox="1"/>
           <p:nvPr/>
         </p:nvSpPr>
         <p:spPr>
           <a:xfrm>
-            <a:off x="566928" y="457200"/>
-            <a:ext cx="11057839" cy="658368"/>
-          </a:xfrm>
-          <a:prstGeom prst="rect">
-            <a:avLst/>
-          </a:prstGeom>
-          <a:noFill/>
-        </p:spPr>
-        <p:txBody>
-          <a:bodyPr wrap="square" lIns="0" rIns="0" tIns="0" bIns="0" anchor="ctr">
-            <a:noAutofit/>
-          </a:bodyPr>
-          <a:lstStyle/>
-          <a:p>
-            <a:pPr>
-              <a:lnSpc>
-                <a:spcPct val="106000"/>
-              </a:lnSpc>
-              <a:defRPr sz="3390" b="1">
-                <a:solidFill>
-                  <a:srgbClr val="7C332A"/>
-                </a:solidFill>
-                <a:latin typeface="Avenir Next"/>
-                <a:ea typeface="Hiragino Sans"/>
-                <a:cs typeface="Hiragino Sans"/>
-              </a:defRPr>
-            </a:pPr>
-            <a:r>
-              <a:rPr>
-                <a:ea typeface="Hiragino Sans"/>
-                <a:cs typeface="Hiragino Sans"/>
-              </a:rPr>
-              <a:t>導出 — 面積がエネルギーになる理由</a:t>
-            </a:r>
-          </a:p>
-        </p:txBody>
-      </p:sp>
-      <p:sp>
-        <p:nvSpPr>
-          <p:cNvPr id="3" name="TextBox 2"/>
-          <p:cNvSpPr txBox="1"/>
-          <p:nvPr/>
-        </p:nvSpPr>
-        <p:spPr>
-          <a:xfrm>
-            <a:off x="566928" y="2384775"/>
-            <a:ext cx="11057839" cy="254000"/>
+            <a:off x="566928" y="146304"/>
+            <a:ext cx="11057839" cy="457200"/>
           </a:xfrm>
           <a:prstGeom prst="rect">
             <a:avLst/>
@@ -10157,30 +9230,60 @@
           </a:bodyPr>
           <a:lstStyle/>
           <a:p>
-            <a:r>
-              <a:rPr sz="1600" b="1">
-                <a:solidFill>
-                  <a:srgbClr val="5C7268"/>
-                </a:solidFill>
-                <a:latin typeface="Avenir Next"/>
-                <a:ea typeface="Hiragino Sans"/>
-                <a:cs typeface="Hiragino Sans"/>
-              </a:rPr>
-              <a:t>① 動揺方程式に δ' を掛けて積分する</a:t>
-            </a:r>
-          </a:p>
-        </p:txBody>
-      </p:sp>
-      <p:sp>
-        <p:nvSpPr>
-          <p:cNvPr id="4" name="TextBox 3"/>
+            <a:pPr>
+              <a:defRPr sz="2400" b="1">
+                <a:solidFill>
+                  <a:srgbClr val="7C332A"/>
+                </a:solidFill>
+                <a:latin typeface="Avenir Next"/>
+                <a:ea typeface="Hiragino Sans"/>
+                <a:cs typeface="Hiragino Sans"/>
+              </a:defRPr>
+            </a:pPr>
+            <a:r>
+              <a:rPr>
+                <a:ea typeface="Hiragino Sans"/>
+                <a:cs typeface="Hiragino Sans"/>
+              </a:rPr>
+              <a:t>導出 — 面積がエネルギーになる理由</a:t>
+            </a:r>
+          </a:p>
+        </p:txBody>
+      </p:sp>
+      <p:pic>
+        <p:nvPicPr>
+          <p:cNvPr id="3" name="Picture 2" descr="ch07_deriv_area_1.png"/>
+          <p:cNvPicPr>
+            <a:picLocks noChangeAspect="1"/>
+          </p:cNvPicPr>
+          <p:nvPr/>
+        </p:nvPicPr>
+        <p:blipFill>
+          <a:blip r:embed="rId2"/>
+          <a:stretch>
+            <a:fillRect/>
+          </a:stretch>
+        </p:blipFill>
+        <p:spPr>
+          <a:xfrm>
+            <a:off x="551856" y="713232"/>
+            <a:ext cx="11087983" cy="5532120"/>
+          </a:xfrm>
+          <a:prstGeom prst="rect">
+            <a:avLst/>
+          </a:prstGeom>
+        </p:spPr>
+      </p:pic>
+      <p:sp>
+        <p:nvSpPr>
+          <p:cNvPr id="4" name="edge:caption"/>
           <p:cNvSpPr txBox="1"/>
           <p:nvPr/>
         </p:nvSpPr>
         <p:spPr>
           <a:xfrm>
-            <a:off x="822960" y="2676875"/>
-            <a:ext cx="10801807" cy="385762"/>
+            <a:off x="228600" y="6300216"/>
+            <a:ext cx="11734495" cy="310896"/>
           </a:xfrm>
           <a:prstGeom prst="rect">
             <a:avLst/>
@@ -10193,336 +9296,24 @@
           </a:bodyPr>
           <a:lstStyle/>
           <a:p>
-            <a:pPr>
-              <a:lnSpc>
-                <a:spcPct val="130000"/>
-              </a:lnSpc>
-            </a:pPr>
-            <a:r>
-              <a:rPr sz="1500">
-                <a:solidFill>
-                  <a:srgbClr val="33221E"/>
-                </a:solidFill>
-                <a:latin typeface="Avenir Next"/>
-                <a:ea typeface="Hiragino Sans"/>
-                <a:cs typeface="Hiragino Sans"/>
-              </a:rPr>
-              <a:t>(2H/ω₀) δ'δ'' = (P_m − P_e) δ'。左辺は (H/ω₀) d(δ'²)/dt で、</a:t>
-            </a:r>
-            <a:r>
-              <a:rPr sz="1500" b="1">
-                <a:solidFill>
-                  <a:srgbClr val="33221E"/>
-                </a:solidFill>
-                <a:latin typeface="Avenir Next"/>
-                <a:ea typeface="Hiragino Sans"/>
-                <a:cs typeface="Hiragino Sans"/>
-              </a:rPr>
-              <a:t>運動エネルギーの時間変化</a:t>
-            </a:r>
-            <a:r>
-              <a:rPr sz="1500">
-                <a:solidFill>
-                  <a:srgbClr val="33221E"/>
-                </a:solidFill>
-                <a:latin typeface="Avenir Next"/>
-                <a:ea typeface="Hiragino Sans"/>
-                <a:cs typeface="Hiragino Sans"/>
-              </a:rPr>
-              <a:t>そのもの。</a:t>
-            </a:r>
-          </a:p>
-        </p:txBody>
-      </p:sp>
-      <p:sp>
-        <p:nvSpPr>
-          <p:cNvPr id="5" name="Rectangle 4"/>
-          <p:cNvSpPr/>
-          <p:nvPr/>
-        </p:nvSpPr>
-        <p:spPr>
-          <a:xfrm>
-            <a:off x="566928" y="3214529"/>
-            <a:ext cx="11057839" cy="9525"/>
-          </a:xfrm>
-          <a:prstGeom prst="rect">
-            <a:avLst/>
-          </a:prstGeom>
-          <a:solidFill>
-            <a:srgbClr val="E5DCCE"/>
-          </a:solidFill>
-          <a:ln>
-            <a:noFill/>
-          </a:ln>
-          <a:effectLst/>
-        </p:spPr>
-        <p:style>
-          <a:lnRef idx="1">
-            <a:schemeClr val="accent1"/>
-          </a:lnRef>
-          <a:fillRef idx="3">
-            <a:schemeClr val="accent1"/>
-          </a:fillRef>
-          <a:effectRef idx="2">
-            <a:schemeClr val="accent1"/>
-          </a:effectRef>
-          <a:fontRef idx="minor">
-            <a:schemeClr val="lt1"/>
-          </a:fontRef>
-        </p:style>
-        <p:txBody>
-          <a:bodyPr rtlCol="0" anchor="ctr"/>
-          <a:lstStyle/>
-          <a:p>
             <a:pPr algn="ctr"/>
-          </a:p>
-        </p:txBody>
-      </p:sp>
-      <p:sp>
-        <p:nvSpPr>
-          <p:cNvPr id="6" name="build:ghost"/>
-          <p:cNvSpPr txBox="1"/>
-          <p:nvPr/>
-        </p:nvSpPr>
-        <p:spPr>
-          <a:xfrm>
-            <a:off x="566928" y="3391821"/>
-            <a:ext cx="11057839" cy="254000"/>
-          </a:xfrm>
-          <a:prstGeom prst="rect">
-            <a:avLst/>
-          </a:prstGeom>
-          <a:noFill/>
-        </p:spPr>
-        <p:txBody>
-          <a:bodyPr wrap="none" lIns="0" rIns="0" tIns="0" bIns="0">
-            <a:noAutofit/>
-          </a:bodyPr>
-          <a:lstStyle/>
-          <a:p>
-            <a:r>
-              <a:rPr sz="1600" b="1">
-                <a:solidFill>
-                  <a:srgbClr val="C1C9C5"/>
-                </a:solidFill>
-                <a:latin typeface="Avenir Next"/>
-                <a:ea typeface="Hiragino Sans"/>
-                <a:cs typeface="Hiragino Sans"/>
-              </a:rPr>
-              <a:t>② dt を dδ に変えると面積になる</a:t>
-            </a:r>
-          </a:p>
-        </p:txBody>
-      </p:sp>
-      <p:sp>
-        <p:nvSpPr>
-          <p:cNvPr id="7" name="build:ghost"/>
-          <p:cNvSpPr txBox="1"/>
-          <p:nvPr/>
-        </p:nvSpPr>
-        <p:spPr>
-          <a:xfrm>
-            <a:off x="822960" y="3683921"/>
-            <a:ext cx="10801807" cy="385762"/>
-          </a:xfrm>
-          <a:prstGeom prst="rect">
-            <a:avLst/>
-          </a:prstGeom>
-          <a:noFill/>
-        </p:spPr>
-        <p:txBody>
-          <a:bodyPr wrap="square" lIns="0" rIns="0" tIns="0" bIns="0">
-            <a:noAutofit/>
-          </a:bodyPr>
-          <a:lstStyle/>
-          <a:p>
-            <a:pPr>
-              <a:lnSpc>
-                <a:spcPct val="130000"/>
-              </a:lnSpc>
-            </a:pPr>
-            <a:r>
-              <a:rPr sz="1500">
-                <a:solidFill>
-                  <a:srgbClr val="C1BCBB"/>
-                </a:solidFill>
-                <a:latin typeface="Avenir Next"/>
-                <a:ea typeface="Hiragino Sans"/>
-                <a:cs typeface="Hiragino Sans"/>
-              </a:rPr>
-              <a:t>両辺を時間で積分し δ' dt = dδ を使うと </a:t>
-            </a:r>
-            <a:r>
-              <a:rPr sz="1500" b="1">
-                <a:solidFill>
-                  <a:srgbClr val="C1BCBB"/>
-                </a:solidFill>
-                <a:latin typeface="Avenir Next"/>
-                <a:ea typeface="Hiragino Sans"/>
-                <a:cs typeface="Hiragino Sans"/>
-              </a:rPr>
-              <a:t>(H/ω₀)(δ')² = ∫(P_m − P_e) dδ</a:t>
-            </a:r>
-            <a:r>
-              <a:rPr sz="1500">
-                <a:solidFill>
-                  <a:srgbClr val="C1BCBB"/>
-                </a:solidFill>
-                <a:latin typeface="Avenir Next"/>
-                <a:ea typeface="Hiragino Sans"/>
-                <a:cs typeface="Hiragino Sans"/>
-              </a:rPr>
-              <a:t>。右辺は P–δ 平面の面積。</a:t>
-            </a:r>
-          </a:p>
-        </p:txBody>
-      </p:sp>
-      <p:sp>
-        <p:nvSpPr>
-          <p:cNvPr id="8" name="Rectangle 7"/>
-          <p:cNvSpPr/>
-          <p:nvPr/>
-        </p:nvSpPr>
-        <p:spPr>
-          <a:xfrm>
-            <a:off x="566928" y="4221575"/>
-            <a:ext cx="11057839" cy="9525"/>
-          </a:xfrm>
-          <a:prstGeom prst="rect">
-            <a:avLst/>
-          </a:prstGeom>
-          <a:solidFill>
-            <a:srgbClr val="E5DCCE"/>
-          </a:solidFill>
-          <a:ln>
-            <a:noFill/>
-          </a:ln>
-          <a:effectLst/>
-        </p:spPr>
-        <p:style>
-          <a:lnRef idx="1">
-            <a:schemeClr val="accent1"/>
-          </a:lnRef>
-          <a:fillRef idx="3">
-            <a:schemeClr val="accent1"/>
-          </a:fillRef>
-          <a:effectRef idx="2">
-            <a:schemeClr val="accent1"/>
-          </a:effectRef>
-          <a:fontRef idx="minor">
-            <a:schemeClr val="lt1"/>
-          </a:fontRef>
-        </p:style>
-        <p:txBody>
-          <a:bodyPr rtlCol="0" anchor="ctr"/>
-          <a:lstStyle/>
-          <a:p>
-            <a:pPr algn="ctr"/>
-          </a:p>
-        </p:txBody>
-      </p:sp>
-      <p:sp>
-        <p:nvSpPr>
-          <p:cNvPr id="9" name="build:ghost"/>
-          <p:cNvSpPr txBox="1"/>
-          <p:nvPr/>
-        </p:nvSpPr>
-        <p:spPr>
-          <a:xfrm>
-            <a:off x="566928" y="4398867"/>
-            <a:ext cx="11057839" cy="254000"/>
-          </a:xfrm>
-          <a:prstGeom prst="rect">
-            <a:avLst/>
-          </a:prstGeom>
-          <a:noFill/>
-        </p:spPr>
-        <p:txBody>
-          <a:bodyPr wrap="none" lIns="0" rIns="0" tIns="0" bIns="0">
-            <a:noAutofit/>
-          </a:bodyPr>
-          <a:lstStyle/>
-          <a:p>
-            <a:r>
-              <a:rPr sz="1600" b="1">
-                <a:solidFill>
-                  <a:srgbClr val="C1C9C5"/>
-                </a:solidFill>
-                <a:latin typeface="Avenir Next"/>
-                <a:ea typeface="Hiragino Sans"/>
-                <a:cs typeface="Hiragino Sans"/>
-              </a:rPr>
-              <a:t>③ 戻れる条件｜どこかで δ' = 0 になること</a:t>
-            </a:r>
-          </a:p>
-        </p:txBody>
-      </p:sp>
-      <p:sp>
-        <p:nvSpPr>
-          <p:cNvPr id="10" name="build:ghost"/>
-          <p:cNvSpPr txBox="1"/>
-          <p:nvPr/>
-        </p:nvSpPr>
-        <p:spPr>
-          <a:xfrm>
-            <a:off x="822960" y="4690967"/>
-            <a:ext cx="10801807" cy="385762"/>
-          </a:xfrm>
-          <a:prstGeom prst="rect">
-            <a:avLst/>
-          </a:prstGeom>
-          <a:noFill/>
-        </p:spPr>
-        <p:txBody>
-          <a:bodyPr wrap="square" lIns="0" rIns="0" tIns="0" bIns="0">
-            <a:noAutofit/>
-          </a:bodyPr>
-          <a:lstStyle/>
-          <a:p>
-            <a:pPr>
-              <a:lnSpc>
-                <a:spcPct val="130000"/>
-              </a:lnSpc>
-            </a:pPr>
-            <a:r>
-              <a:rPr sz="1500">
-                <a:solidFill>
-                  <a:srgbClr val="C1BCBB"/>
-                </a:solidFill>
-                <a:latin typeface="Avenir Next"/>
-                <a:ea typeface="Hiragino Sans"/>
-                <a:cs typeface="Hiragino Sans"/>
-              </a:rPr>
-              <a:t>加速で貯めた面積 A1 を、減速の面積 A2 で使い切れば速度が 0 になり戻ってくる。</a:t>
-            </a:r>
-            <a:r>
-              <a:rPr sz="1500" b="1">
-                <a:solidFill>
-                  <a:srgbClr val="C1BCBB"/>
-                </a:solidFill>
-                <a:latin typeface="Avenir Next"/>
-                <a:ea typeface="Hiragino Sans"/>
-                <a:cs typeface="Hiragino Sans"/>
-              </a:rPr>
-              <a:t>A1 = A2 が境目</a:t>
-            </a:r>
-            <a:r>
-              <a:rPr sz="1500">
-                <a:solidFill>
-                  <a:srgbClr val="C1BCBB"/>
-                </a:solidFill>
-                <a:latin typeface="Avenir Next"/>
-                <a:ea typeface="Hiragino Sans"/>
-                <a:cs typeface="Hiragino Sans"/>
-              </a:rPr>
-              <a:t>。</a:t>
-            </a:r>
-          </a:p>
-        </p:txBody>
-      </p:sp>
-      <p:sp>
-        <p:nvSpPr>
-          <p:cNvPr id="11" name="TextBox 10"/>
+            <a:r>
+              <a:rPr sz="1400">
+                <a:solidFill>
+                  <a:srgbClr val="71635B"/>
+                </a:solidFill>
+                <a:latin typeface="Avenir Next"/>
+                <a:ea typeface="Hiragino Sans"/>
+                <a:cs typeface="Hiragino Sans"/>
+              </a:rPr>
+              <a:t>(2H/ω₀) δ'δ'' = (P_m − P_e) δ'。左辺は (H/ω₀) d(δ'²)/dt で、運動エネルギーの時間変化そのもの。　出典｜コード/fig_ch07.py</a:t>
+            </a:r>
+          </a:p>
+        </p:txBody>
+      </p:sp>
+      <p:sp>
+        <p:nvSpPr>
+          <p:cNvPr id="5" name="TextBox 4"/>
           <p:cNvSpPr txBox="1"/>
           <p:nvPr/>
         </p:nvSpPr>
@@ -10578,59 +9369,14 @@
       <p:grpSpPr/>
       <p:sp>
         <p:nvSpPr>
-          <p:cNvPr id="2" name="TextBox 1"/>
+          <p:cNvPr id="2" name="edge:title"/>
           <p:cNvSpPr txBox="1"/>
           <p:nvPr/>
         </p:nvSpPr>
         <p:spPr>
           <a:xfrm>
-            <a:off x="566928" y="457200"/>
-            <a:ext cx="11057839" cy="658368"/>
-          </a:xfrm>
-          <a:prstGeom prst="rect">
-            <a:avLst/>
-          </a:prstGeom>
-          <a:noFill/>
-        </p:spPr>
-        <p:txBody>
-          <a:bodyPr wrap="square" lIns="0" rIns="0" tIns="0" bIns="0" anchor="ctr">
-            <a:noAutofit/>
-          </a:bodyPr>
-          <a:lstStyle/>
-          <a:p>
-            <a:pPr>
-              <a:lnSpc>
-                <a:spcPct val="106000"/>
-              </a:lnSpc>
-              <a:defRPr sz="3390" b="1">
-                <a:solidFill>
-                  <a:srgbClr val="7C332A"/>
-                </a:solidFill>
-                <a:latin typeface="Avenir Next"/>
-                <a:ea typeface="Hiragino Sans"/>
-                <a:cs typeface="Hiragino Sans"/>
-              </a:defRPr>
-            </a:pPr>
-            <a:r>
-              <a:rPr>
-                <a:ea typeface="Hiragino Sans"/>
-                <a:cs typeface="Hiragino Sans"/>
-              </a:rPr>
-              <a:t>導出 — 面積がエネルギーになる理由</a:t>
-            </a:r>
-          </a:p>
-        </p:txBody>
-      </p:sp>
-      <p:sp>
-        <p:nvSpPr>
-          <p:cNvPr id="3" name="TextBox 2"/>
-          <p:cNvSpPr txBox="1"/>
-          <p:nvPr/>
-        </p:nvSpPr>
-        <p:spPr>
-          <a:xfrm>
-            <a:off x="566928" y="2384775"/>
-            <a:ext cx="11057839" cy="254000"/>
+            <a:off x="566928" y="146304"/>
+            <a:ext cx="11057839" cy="457200"/>
           </a:xfrm>
           <a:prstGeom prst="rect">
             <a:avLst/>
@@ -10643,30 +9389,60 @@
           </a:bodyPr>
           <a:lstStyle/>
           <a:p>
-            <a:r>
-              <a:rPr sz="1600" b="1">
-                <a:solidFill>
-                  <a:srgbClr val="5C7268"/>
-                </a:solidFill>
-                <a:latin typeface="Avenir Next"/>
-                <a:ea typeface="Hiragino Sans"/>
-                <a:cs typeface="Hiragino Sans"/>
-              </a:rPr>
-              <a:t>① 動揺方程式に δ' を掛けて積分する</a:t>
-            </a:r>
-          </a:p>
-        </p:txBody>
-      </p:sp>
-      <p:sp>
-        <p:nvSpPr>
-          <p:cNvPr id="4" name="TextBox 3"/>
+            <a:pPr>
+              <a:defRPr sz="2400" b="1">
+                <a:solidFill>
+                  <a:srgbClr val="7C332A"/>
+                </a:solidFill>
+                <a:latin typeface="Avenir Next"/>
+                <a:ea typeface="Hiragino Sans"/>
+                <a:cs typeface="Hiragino Sans"/>
+              </a:defRPr>
+            </a:pPr>
+            <a:r>
+              <a:rPr>
+                <a:ea typeface="Hiragino Sans"/>
+                <a:cs typeface="Hiragino Sans"/>
+              </a:rPr>
+              <a:t>導出 — 面積がエネルギーになる理由</a:t>
+            </a:r>
+          </a:p>
+        </p:txBody>
+      </p:sp>
+      <p:pic>
+        <p:nvPicPr>
+          <p:cNvPr id="3" name="Picture 2" descr="ch07_deriv_area_2.png"/>
+          <p:cNvPicPr>
+            <a:picLocks noChangeAspect="1"/>
+          </p:cNvPicPr>
+          <p:nvPr/>
+        </p:nvPicPr>
+        <p:blipFill>
+          <a:blip r:embed="rId2"/>
+          <a:stretch>
+            <a:fillRect/>
+          </a:stretch>
+        </p:blipFill>
+        <p:spPr>
+          <a:xfrm>
+            <a:off x="551856" y="713232"/>
+            <a:ext cx="11087983" cy="5532120"/>
+          </a:xfrm>
+          <a:prstGeom prst="rect">
+            <a:avLst/>
+          </a:prstGeom>
+        </p:spPr>
+      </p:pic>
+      <p:sp>
+        <p:nvSpPr>
+          <p:cNvPr id="4" name="edge:caption"/>
           <p:cNvSpPr txBox="1"/>
           <p:nvPr/>
         </p:nvSpPr>
         <p:spPr>
           <a:xfrm>
-            <a:off x="822960" y="2676875"/>
-            <a:ext cx="10801807" cy="385762"/>
+            <a:off x="228600" y="6300216"/>
+            <a:ext cx="11734495" cy="310896"/>
           </a:xfrm>
           <a:prstGeom prst="rect">
             <a:avLst/>
@@ -10679,336 +9455,24 @@
           </a:bodyPr>
           <a:lstStyle/>
           <a:p>
-            <a:pPr>
-              <a:lnSpc>
-                <a:spcPct val="130000"/>
-              </a:lnSpc>
-            </a:pPr>
-            <a:r>
-              <a:rPr sz="1500">
-                <a:solidFill>
-                  <a:srgbClr val="33221E"/>
-                </a:solidFill>
-                <a:latin typeface="Avenir Next"/>
-                <a:ea typeface="Hiragino Sans"/>
-                <a:cs typeface="Hiragino Sans"/>
-              </a:rPr>
-              <a:t>(2H/ω₀) δ'δ'' = (P_m − P_e) δ'。左辺は (H/ω₀) d(δ'²)/dt で、</a:t>
-            </a:r>
-            <a:r>
-              <a:rPr sz="1500" b="1">
-                <a:solidFill>
-                  <a:srgbClr val="33221E"/>
-                </a:solidFill>
-                <a:latin typeface="Avenir Next"/>
-                <a:ea typeface="Hiragino Sans"/>
-                <a:cs typeface="Hiragino Sans"/>
-              </a:rPr>
-              <a:t>運動エネルギーの時間変化</a:t>
-            </a:r>
-            <a:r>
-              <a:rPr sz="1500">
-                <a:solidFill>
-                  <a:srgbClr val="33221E"/>
-                </a:solidFill>
-                <a:latin typeface="Avenir Next"/>
-                <a:ea typeface="Hiragino Sans"/>
-                <a:cs typeface="Hiragino Sans"/>
-              </a:rPr>
-              <a:t>そのもの。</a:t>
-            </a:r>
-          </a:p>
-        </p:txBody>
-      </p:sp>
-      <p:sp>
-        <p:nvSpPr>
-          <p:cNvPr id="5" name="Rectangle 4"/>
-          <p:cNvSpPr/>
-          <p:nvPr/>
-        </p:nvSpPr>
-        <p:spPr>
-          <a:xfrm>
-            <a:off x="566928" y="3214529"/>
-            <a:ext cx="11057839" cy="9525"/>
-          </a:xfrm>
-          <a:prstGeom prst="rect">
-            <a:avLst/>
-          </a:prstGeom>
-          <a:solidFill>
-            <a:srgbClr val="E5DCCE"/>
-          </a:solidFill>
-          <a:ln>
-            <a:noFill/>
-          </a:ln>
-          <a:effectLst/>
-        </p:spPr>
-        <p:style>
-          <a:lnRef idx="1">
-            <a:schemeClr val="accent1"/>
-          </a:lnRef>
-          <a:fillRef idx="3">
-            <a:schemeClr val="accent1"/>
-          </a:fillRef>
-          <a:effectRef idx="2">
-            <a:schemeClr val="accent1"/>
-          </a:effectRef>
-          <a:fontRef idx="minor">
-            <a:schemeClr val="lt1"/>
-          </a:fontRef>
-        </p:style>
-        <p:txBody>
-          <a:bodyPr rtlCol="0" anchor="ctr"/>
-          <a:lstStyle/>
-          <a:p>
             <a:pPr algn="ctr"/>
-          </a:p>
-        </p:txBody>
-      </p:sp>
-      <p:sp>
-        <p:nvSpPr>
-          <p:cNvPr id="6" name="TextBox 5"/>
-          <p:cNvSpPr txBox="1"/>
-          <p:nvPr/>
-        </p:nvSpPr>
-        <p:spPr>
-          <a:xfrm>
-            <a:off x="566928" y="3391821"/>
-            <a:ext cx="11057839" cy="254000"/>
-          </a:xfrm>
-          <a:prstGeom prst="rect">
-            <a:avLst/>
-          </a:prstGeom>
-          <a:noFill/>
-        </p:spPr>
-        <p:txBody>
-          <a:bodyPr wrap="none" lIns="0" rIns="0" tIns="0" bIns="0">
-            <a:noAutofit/>
-          </a:bodyPr>
-          <a:lstStyle/>
-          <a:p>
-            <a:r>
-              <a:rPr sz="1600" b="1">
-                <a:solidFill>
-                  <a:srgbClr val="5C7268"/>
-                </a:solidFill>
-                <a:latin typeface="Avenir Next"/>
-                <a:ea typeface="Hiragino Sans"/>
-                <a:cs typeface="Hiragino Sans"/>
-              </a:rPr>
-              <a:t>② dt を dδ に変えると面積になる</a:t>
-            </a:r>
-          </a:p>
-        </p:txBody>
-      </p:sp>
-      <p:sp>
-        <p:nvSpPr>
-          <p:cNvPr id="7" name="TextBox 6"/>
-          <p:cNvSpPr txBox="1"/>
-          <p:nvPr/>
-        </p:nvSpPr>
-        <p:spPr>
-          <a:xfrm>
-            <a:off x="822960" y="3683921"/>
-            <a:ext cx="10801807" cy="385762"/>
-          </a:xfrm>
-          <a:prstGeom prst="rect">
-            <a:avLst/>
-          </a:prstGeom>
-          <a:noFill/>
-        </p:spPr>
-        <p:txBody>
-          <a:bodyPr wrap="square" lIns="0" rIns="0" tIns="0" bIns="0">
-            <a:noAutofit/>
-          </a:bodyPr>
-          <a:lstStyle/>
-          <a:p>
-            <a:pPr>
-              <a:lnSpc>
-                <a:spcPct val="130000"/>
-              </a:lnSpc>
-            </a:pPr>
-            <a:r>
-              <a:rPr sz="1500">
-                <a:solidFill>
-                  <a:srgbClr val="33221E"/>
-                </a:solidFill>
-                <a:latin typeface="Avenir Next"/>
-                <a:ea typeface="Hiragino Sans"/>
-                <a:cs typeface="Hiragino Sans"/>
-              </a:rPr>
-              <a:t>両辺を時間で積分し δ' dt = dδ を使うと </a:t>
-            </a:r>
-            <a:r>
-              <a:rPr sz="1500" b="1">
-                <a:solidFill>
-                  <a:srgbClr val="33221E"/>
-                </a:solidFill>
-                <a:latin typeface="Avenir Next"/>
-                <a:ea typeface="Hiragino Sans"/>
-                <a:cs typeface="Hiragino Sans"/>
-              </a:rPr>
-              <a:t>(H/ω₀)(δ')² = ∫(P_m − P_e) dδ</a:t>
-            </a:r>
-            <a:r>
-              <a:rPr sz="1500">
-                <a:solidFill>
-                  <a:srgbClr val="33221E"/>
-                </a:solidFill>
-                <a:latin typeface="Avenir Next"/>
-                <a:ea typeface="Hiragino Sans"/>
-                <a:cs typeface="Hiragino Sans"/>
-              </a:rPr>
-              <a:t>。右辺は P–δ 平面の面積。</a:t>
-            </a:r>
-          </a:p>
-        </p:txBody>
-      </p:sp>
-      <p:sp>
-        <p:nvSpPr>
-          <p:cNvPr id="8" name="Rectangle 7"/>
-          <p:cNvSpPr/>
-          <p:nvPr/>
-        </p:nvSpPr>
-        <p:spPr>
-          <a:xfrm>
-            <a:off x="566928" y="4221575"/>
-            <a:ext cx="11057839" cy="9525"/>
-          </a:xfrm>
-          <a:prstGeom prst="rect">
-            <a:avLst/>
-          </a:prstGeom>
-          <a:solidFill>
-            <a:srgbClr val="E5DCCE"/>
-          </a:solidFill>
-          <a:ln>
-            <a:noFill/>
-          </a:ln>
-          <a:effectLst/>
-        </p:spPr>
-        <p:style>
-          <a:lnRef idx="1">
-            <a:schemeClr val="accent1"/>
-          </a:lnRef>
-          <a:fillRef idx="3">
-            <a:schemeClr val="accent1"/>
-          </a:fillRef>
-          <a:effectRef idx="2">
-            <a:schemeClr val="accent1"/>
-          </a:effectRef>
-          <a:fontRef idx="minor">
-            <a:schemeClr val="lt1"/>
-          </a:fontRef>
-        </p:style>
-        <p:txBody>
-          <a:bodyPr rtlCol="0" anchor="ctr"/>
-          <a:lstStyle/>
-          <a:p>
-            <a:pPr algn="ctr"/>
-          </a:p>
-        </p:txBody>
-      </p:sp>
-      <p:sp>
-        <p:nvSpPr>
-          <p:cNvPr id="9" name="build:ghost"/>
-          <p:cNvSpPr txBox="1"/>
-          <p:nvPr/>
-        </p:nvSpPr>
-        <p:spPr>
-          <a:xfrm>
-            <a:off x="566928" y="4398867"/>
-            <a:ext cx="11057839" cy="254000"/>
-          </a:xfrm>
-          <a:prstGeom prst="rect">
-            <a:avLst/>
-          </a:prstGeom>
-          <a:noFill/>
-        </p:spPr>
-        <p:txBody>
-          <a:bodyPr wrap="none" lIns="0" rIns="0" tIns="0" bIns="0">
-            <a:noAutofit/>
-          </a:bodyPr>
-          <a:lstStyle/>
-          <a:p>
-            <a:r>
-              <a:rPr sz="1600" b="1">
-                <a:solidFill>
-                  <a:srgbClr val="C1C9C5"/>
-                </a:solidFill>
-                <a:latin typeface="Avenir Next"/>
-                <a:ea typeface="Hiragino Sans"/>
-                <a:cs typeface="Hiragino Sans"/>
-              </a:rPr>
-              <a:t>③ 戻れる条件｜どこかで δ' = 0 になること</a:t>
-            </a:r>
-          </a:p>
-        </p:txBody>
-      </p:sp>
-      <p:sp>
-        <p:nvSpPr>
-          <p:cNvPr id="10" name="build:ghost"/>
-          <p:cNvSpPr txBox="1"/>
-          <p:nvPr/>
-        </p:nvSpPr>
-        <p:spPr>
-          <a:xfrm>
-            <a:off x="822960" y="4690967"/>
-            <a:ext cx="10801807" cy="385762"/>
-          </a:xfrm>
-          <a:prstGeom prst="rect">
-            <a:avLst/>
-          </a:prstGeom>
-          <a:noFill/>
-        </p:spPr>
-        <p:txBody>
-          <a:bodyPr wrap="square" lIns="0" rIns="0" tIns="0" bIns="0">
-            <a:noAutofit/>
-          </a:bodyPr>
-          <a:lstStyle/>
-          <a:p>
-            <a:pPr>
-              <a:lnSpc>
-                <a:spcPct val="130000"/>
-              </a:lnSpc>
-            </a:pPr>
-            <a:r>
-              <a:rPr sz="1500">
-                <a:solidFill>
-                  <a:srgbClr val="C1BCBB"/>
-                </a:solidFill>
-                <a:latin typeface="Avenir Next"/>
-                <a:ea typeface="Hiragino Sans"/>
-                <a:cs typeface="Hiragino Sans"/>
-              </a:rPr>
-              <a:t>加速で貯めた面積 A1 を、減速の面積 A2 で使い切れば速度が 0 になり戻ってくる。</a:t>
-            </a:r>
-            <a:r>
-              <a:rPr sz="1500" b="1">
-                <a:solidFill>
-                  <a:srgbClr val="C1BCBB"/>
-                </a:solidFill>
-                <a:latin typeface="Avenir Next"/>
-                <a:ea typeface="Hiragino Sans"/>
-                <a:cs typeface="Hiragino Sans"/>
-              </a:rPr>
-              <a:t>A1 = A2 が境目</a:t>
-            </a:r>
-            <a:r>
-              <a:rPr sz="1500">
-                <a:solidFill>
-                  <a:srgbClr val="C1BCBB"/>
-                </a:solidFill>
-                <a:latin typeface="Avenir Next"/>
-                <a:ea typeface="Hiragino Sans"/>
-                <a:cs typeface="Hiragino Sans"/>
-              </a:rPr>
-              <a:t>。</a:t>
-            </a:r>
-          </a:p>
-        </p:txBody>
-      </p:sp>
-      <p:sp>
-        <p:nvSpPr>
-          <p:cNvPr id="11" name="TextBox 10"/>
+            <a:r>
+              <a:rPr sz="1400">
+                <a:solidFill>
+                  <a:srgbClr val="71635B"/>
+                </a:solidFill>
+                <a:latin typeface="Avenir Next"/>
+                <a:ea typeface="Hiragino Sans"/>
+                <a:cs typeface="Hiragino Sans"/>
+              </a:rPr>
+              <a:t>両辺を時間で積分し δ' dt = dδ を使うと (H/ω₀)(δ')² = ∫(P_m − P_e) dδ。右辺は P–δ 平面の面積。　出典｜コード/fig_ch07.py</a:t>
+            </a:r>
+          </a:p>
+        </p:txBody>
+      </p:sp>
+      <p:sp>
+        <p:nvSpPr>
+          <p:cNvPr id="5" name="TextBox 4"/>
           <p:cNvSpPr txBox="1"/>
           <p:nvPr/>
         </p:nvSpPr>
@@ -11064,59 +9528,14 @@
       <p:grpSpPr/>
       <p:sp>
         <p:nvSpPr>
-          <p:cNvPr id="2" name="TextBox 1"/>
+          <p:cNvPr id="2" name="edge:title"/>
           <p:cNvSpPr txBox="1"/>
           <p:nvPr/>
         </p:nvSpPr>
         <p:spPr>
           <a:xfrm>
-            <a:off x="566928" y="457200"/>
-            <a:ext cx="11057839" cy="658368"/>
-          </a:xfrm>
-          <a:prstGeom prst="rect">
-            <a:avLst/>
-          </a:prstGeom>
-          <a:noFill/>
-        </p:spPr>
-        <p:txBody>
-          <a:bodyPr wrap="square" lIns="0" rIns="0" tIns="0" bIns="0" anchor="ctr">
-            <a:noAutofit/>
-          </a:bodyPr>
-          <a:lstStyle/>
-          <a:p>
-            <a:pPr>
-              <a:lnSpc>
-                <a:spcPct val="106000"/>
-              </a:lnSpc>
-              <a:defRPr sz="3390" b="1">
-                <a:solidFill>
-                  <a:srgbClr val="7C332A"/>
-                </a:solidFill>
-                <a:latin typeface="Avenir Next"/>
-                <a:ea typeface="Hiragino Sans"/>
-                <a:cs typeface="Hiragino Sans"/>
-              </a:defRPr>
-            </a:pPr>
-            <a:r>
-              <a:rPr>
-                <a:ea typeface="Hiragino Sans"/>
-                <a:cs typeface="Hiragino Sans"/>
-              </a:rPr>
-              <a:t>導出 — 面積がエネルギーになる理由</a:t>
-            </a:r>
-          </a:p>
-        </p:txBody>
-      </p:sp>
-      <p:sp>
-        <p:nvSpPr>
-          <p:cNvPr id="3" name="TextBox 2"/>
-          <p:cNvSpPr txBox="1"/>
-          <p:nvPr/>
-        </p:nvSpPr>
-        <p:spPr>
-          <a:xfrm>
-            <a:off x="566928" y="2384775"/>
-            <a:ext cx="11057839" cy="254000"/>
+            <a:off x="566928" y="146304"/>
+            <a:ext cx="11057839" cy="457200"/>
           </a:xfrm>
           <a:prstGeom prst="rect">
             <a:avLst/>
@@ -11129,30 +9548,60 @@
           </a:bodyPr>
           <a:lstStyle/>
           <a:p>
-            <a:r>
-              <a:rPr sz="1600" b="1">
-                <a:solidFill>
-                  <a:srgbClr val="5C7268"/>
-                </a:solidFill>
-                <a:latin typeface="Avenir Next"/>
-                <a:ea typeface="Hiragino Sans"/>
-                <a:cs typeface="Hiragino Sans"/>
-              </a:rPr>
-              <a:t>① 動揺方程式に δ' を掛けて積分する</a:t>
-            </a:r>
-          </a:p>
-        </p:txBody>
-      </p:sp>
-      <p:sp>
-        <p:nvSpPr>
-          <p:cNvPr id="4" name="TextBox 3"/>
+            <a:pPr>
+              <a:defRPr sz="2400" b="1">
+                <a:solidFill>
+                  <a:srgbClr val="7C332A"/>
+                </a:solidFill>
+                <a:latin typeface="Avenir Next"/>
+                <a:ea typeface="Hiragino Sans"/>
+                <a:cs typeface="Hiragino Sans"/>
+              </a:defRPr>
+            </a:pPr>
+            <a:r>
+              <a:rPr>
+                <a:ea typeface="Hiragino Sans"/>
+                <a:cs typeface="Hiragino Sans"/>
+              </a:rPr>
+              <a:t>導出 — 面積がエネルギーになる理由</a:t>
+            </a:r>
+          </a:p>
+        </p:txBody>
+      </p:sp>
+      <p:pic>
+        <p:nvPicPr>
+          <p:cNvPr id="3" name="Picture 2" descr="ch07_deriv_area_3.png"/>
+          <p:cNvPicPr>
+            <a:picLocks noChangeAspect="1"/>
+          </p:cNvPicPr>
+          <p:nvPr/>
+        </p:nvPicPr>
+        <p:blipFill>
+          <a:blip r:embed="rId2"/>
+          <a:stretch>
+            <a:fillRect/>
+          </a:stretch>
+        </p:blipFill>
+        <p:spPr>
+          <a:xfrm>
+            <a:off x="551856" y="713232"/>
+            <a:ext cx="11087983" cy="5532120"/>
+          </a:xfrm>
+          <a:prstGeom prst="rect">
+            <a:avLst/>
+          </a:prstGeom>
+        </p:spPr>
+      </p:pic>
+      <p:sp>
+        <p:nvSpPr>
+          <p:cNvPr id="4" name="edge:caption"/>
           <p:cNvSpPr txBox="1"/>
           <p:nvPr/>
         </p:nvSpPr>
         <p:spPr>
           <a:xfrm>
-            <a:off x="822960" y="2676875"/>
-            <a:ext cx="10801807" cy="385762"/>
+            <a:off x="228600" y="6300216"/>
+            <a:ext cx="11734495" cy="310896"/>
           </a:xfrm>
           <a:prstGeom prst="rect">
             <a:avLst/>
@@ -11165,336 +9614,24 @@
           </a:bodyPr>
           <a:lstStyle/>
           <a:p>
-            <a:pPr>
-              <a:lnSpc>
-                <a:spcPct val="130000"/>
-              </a:lnSpc>
-            </a:pPr>
-            <a:r>
-              <a:rPr sz="1500">
-                <a:solidFill>
-                  <a:srgbClr val="33221E"/>
-                </a:solidFill>
-                <a:latin typeface="Avenir Next"/>
-                <a:ea typeface="Hiragino Sans"/>
-                <a:cs typeface="Hiragino Sans"/>
-              </a:rPr>
-              <a:t>(2H/ω₀) δ'δ'' = (P_m − P_e) δ'。左辺は (H/ω₀) d(δ'²)/dt で、</a:t>
-            </a:r>
-            <a:r>
-              <a:rPr sz="1500" b="1">
-                <a:solidFill>
-                  <a:srgbClr val="33221E"/>
-                </a:solidFill>
-                <a:latin typeface="Avenir Next"/>
-                <a:ea typeface="Hiragino Sans"/>
-                <a:cs typeface="Hiragino Sans"/>
-              </a:rPr>
-              <a:t>運動エネルギーの時間変化</a:t>
-            </a:r>
-            <a:r>
-              <a:rPr sz="1500">
-                <a:solidFill>
-                  <a:srgbClr val="33221E"/>
-                </a:solidFill>
-                <a:latin typeface="Avenir Next"/>
-                <a:ea typeface="Hiragino Sans"/>
-                <a:cs typeface="Hiragino Sans"/>
-              </a:rPr>
-              <a:t>そのもの。</a:t>
-            </a:r>
-          </a:p>
-        </p:txBody>
-      </p:sp>
-      <p:sp>
-        <p:nvSpPr>
-          <p:cNvPr id="5" name="Rectangle 4"/>
-          <p:cNvSpPr/>
-          <p:nvPr/>
-        </p:nvSpPr>
-        <p:spPr>
-          <a:xfrm>
-            <a:off x="566928" y="3214529"/>
-            <a:ext cx="11057839" cy="9525"/>
-          </a:xfrm>
-          <a:prstGeom prst="rect">
-            <a:avLst/>
-          </a:prstGeom>
-          <a:solidFill>
-            <a:srgbClr val="E5DCCE"/>
-          </a:solidFill>
-          <a:ln>
-            <a:noFill/>
-          </a:ln>
-          <a:effectLst/>
-        </p:spPr>
-        <p:style>
-          <a:lnRef idx="1">
-            <a:schemeClr val="accent1"/>
-          </a:lnRef>
-          <a:fillRef idx="3">
-            <a:schemeClr val="accent1"/>
-          </a:fillRef>
-          <a:effectRef idx="2">
-            <a:schemeClr val="accent1"/>
-          </a:effectRef>
-          <a:fontRef idx="minor">
-            <a:schemeClr val="lt1"/>
-          </a:fontRef>
-        </p:style>
-        <p:txBody>
-          <a:bodyPr rtlCol="0" anchor="ctr"/>
-          <a:lstStyle/>
-          <a:p>
             <a:pPr algn="ctr"/>
-          </a:p>
-        </p:txBody>
-      </p:sp>
-      <p:sp>
-        <p:nvSpPr>
-          <p:cNvPr id="6" name="TextBox 5"/>
-          <p:cNvSpPr txBox="1"/>
-          <p:nvPr/>
-        </p:nvSpPr>
-        <p:spPr>
-          <a:xfrm>
-            <a:off x="566928" y="3391821"/>
-            <a:ext cx="11057839" cy="254000"/>
-          </a:xfrm>
-          <a:prstGeom prst="rect">
-            <a:avLst/>
-          </a:prstGeom>
-          <a:noFill/>
-        </p:spPr>
-        <p:txBody>
-          <a:bodyPr wrap="none" lIns="0" rIns="0" tIns="0" bIns="0">
-            <a:noAutofit/>
-          </a:bodyPr>
-          <a:lstStyle/>
-          <a:p>
-            <a:r>
-              <a:rPr sz="1600" b="1">
-                <a:solidFill>
-                  <a:srgbClr val="5C7268"/>
-                </a:solidFill>
-                <a:latin typeface="Avenir Next"/>
-                <a:ea typeface="Hiragino Sans"/>
-                <a:cs typeface="Hiragino Sans"/>
-              </a:rPr>
-              <a:t>② dt を dδ に変えると面積になる</a:t>
-            </a:r>
-          </a:p>
-        </p:txBody>
-      </p:sp>
-      <p:sp>
-        <p:nvSpPr>
-          <p:cNvPr id="7" name="TextBox 6"/>
-          <p:cNvSpPr txBox="1"/>
-          <p:nvPr/>
-        </p:nvSpPr>
-        <p:spPr>
-          <a:xfrm>
-            <a:off x="822960" y="3683921"/>
-            <a:ext cx="10801807" cy="385762"/>
-          </a:xfrm>
-          <a:prstGeom prst="rect">
-            <a:avLst/>
-          </a:prstGeom>
-          <a:noFill/>
-        </p:spPr>
-        <p:txBody>
-          <a:bodyPr wrap="square" lIns="0" rIns="0" tIns="0" bIns="0">
-            <a:noAutofit/>
-          </a:bodyPr>
-          <a:lstStyle/>
-          <a:p>
-            <a:pPr>
-              <a:lnSpc>
-                <a:spcPct val="130000"/>
-              </a:lnSpc>
-            </a:pPr>
-            <a:r>
-              <a:rPr sz="1500">
-                <a:solidFill>
-                  <a:srgbClr val="33221E"/>
-                </a:solidFill>
-                <a:latin typeface="Avenir Next"/>
-                <a:ea typeface="Hiragino Sans"/>
-                <a:cs typeface="Hiragino Sans"/>
-              </a:rPr>
-              <a:t>両辺を時間で積分し δ' dt = dδ を使うと </a:t>
-            </a:r>
-            <a:r>
-              <a:rPr sz="1500" b="1">
-                <a:solidFill>
-                  <a:srgbClr val="33221E"/>
-                </a:solidFill>
-                <a:latin typeface="Avenir Next"/>
-                <a:ea typeface="Hiragino Sans"/>
-                <a:cs typeface="Hiragino Sans"/>
-              </a:rPr>
-              <a:t>(H/ω₀)(δ')² = ∫(P_m − P_e) dδ</a:t>
-            </a:r>
-            <a:r>
-              <a:rPr sz="1500">
-                <a:solidFill>
-                  <a:srgbClr val="33221E"/>
-                </a:solidFill>
-                <a:latin typeface="Avenir Next"/>
-                <a:ea typeface="Hiragino Sans"/>
-                <a:cs typeface="Hiragino Sans"/>
-              </a:rPr>
-              <a:t>。右辺は P–δ 平面の面積。</a:t>
-            </a:r>
-          </a:p>
-        </p:txBody>
-      </p:sp>
-      <p:sp>
-        <p:nvSpPr>
-          <p:cNvPr id="8" name="Rectangle 7"/>
-          <p:cNvSpPr/>
-          <p:nvPr/>
-        </p:nvSpPr>
-        <p:spPr>
-          <a:xfrm>
-            <a:off x="566928" y="4221575"/>
-            <a:ext cx="11057839" cy="9525"/>
-          </a:xfrm>
-          <a:prstGeom prst="rect">
-            <a:avLst/>
-          </a:prstGeom>
-          <a:solidFill>
-            <a:srgbClr val="E5DCCE"/>
-          </a:solidFill>
-          <a:ln>
-            <a:noFill/>
-          </a:ln>
-          <a:effectLst/>
-        </p:spPr>
-        <p:style>
-          <a:lnRef idx="1">
-            <a:schemeClr val="accent1"/>
-          </a:lnRef>
-          <a:fillRef idx="3">
-            <a:schemeClr val="accent1"/>
-          </a:fillRef>
-          <a:effectRef idx="2">
-            <a:schemeClr val="accent1"/>
-          </a:effectRef>
-          <a:fontRef idx="minor">
-            <a:schemeClr val="lt1"/>
-          </a:fontRef>
-        </p:style>
-        <p:txBody>
-          <a:bodyPr rtlCol="0" anchor="ctr"/>
-          <a:lstStyle/>
-          <a:p>
-            <a:pPr algn="ctr"/>
-          </a:p>
-        </p:txBody>
-      </p:sp>
-      <p:sp>
-        <p:nvSpPr>
-          <p:cNvPr id="9" name="TextBox 8"/>
-          <p:cNvSpPr txBox="1"/>
-          <p:nvPr/>
-        </p:nvSpPr>
-        <p:spPr>
-          <a:xfrm>
-            <a:off x="566928" y="4398867"/>
-            <a:ext cx="11057839" cy="254000"/>
-          </a:xfrm>
-          <a:prstGeom prst="rect">
-            <a:avLst/>
-          </a:prstGeom>
-          <a:noFill/>
-        </p:spPr>
-        <p:txBody>
-          <a:bodyPr wrap="none" lIns="0" rIns="0" tIns="0" bIns="0">
-            <a:noAutofit/>
-          </a:bodyPr>
-          <a:lstStyle/>
-          <a:p>
-            <a:r>
-              <a:rPr sz="1600" b="1">
-                <a:solidFill>
-                  <a:srgbClr val="5C7268"/>
-                </a:solidFill>
-                <a:latin typeface="Avenir Next"/>
-                <a:ea typeface="Hiragino Sans"/>
-                <a:cs typeface="Hiragino Sans"/>
-              </a:rPr>
-              <a:t>③ 戻れる条件｜どこかで δ' = 0 になること</a:t>
-            </a:r>
-          </a:p>
-        </p:txBody>
-      </p:sp>
-      <p:sp>
-        <p:nvSpPr>
-          <p:cNvPr id="10" name="TextBox 9"/>
-          <p:cNvSpPr txBox="1"/>
-          <p:nvPr/>
-        </p:nvSpPr>
-        <p:spPr>
-          <a:xfrm>
-            <a:off x="822960" y="4690967"/>
-            <a:ext cx="10801807" cy="385762"/>
-          </a:xfrm>
-          <a:prstGeom prst="rect">
-            <a:avLst/>
-          </a:prstGeom>
-          <a:noFill/>
-        </p:spPr>
-        <p:txBody>
-          <a:bodyPr wrap="square" lIns="0" rIns="0" tIns="0" bIns="0">
-            <a:noAutofit/>
-          </a:bodyPr>
-          <a:lstStyle/>
-          <a:p>
-            <a:pPr>
-              <a:lnSpc>
-                <a:spcPct val="130000"/>
-              </a:lnSpc>
-            </a:pPr>
-            <a:r>
-              <a:rPr sz="1500">
-                <a:solidFill>
-                  <a:srgbClr val="33221E"/>
-                </a:solidFill>
-                <a:latin typeface="Avenir Next"/>
-                <a:ea typeface="Hiragino Sans"/>
-                <a:cs typeface="Hiragino Sans"/>
-              </a:rPr>
-              <a:t>加速で貯めた面積 A1 を、減速の面積 A2 で使い切れば速度が 0 になり戻ってくる。</a:t>
-            </a:r>
-            <a:r>
-              <a:rPr sz="1500" b="1">
-                <a:solidFill>
-                  <a:srgbClr val="33221E"/>
-                </a:solidFill>
-                <a:latin typeface="Avenir Next"/>
-                <a:ea typeface="Hiragino Sans"/>
-                <a:cs typeface="Hiragino Sans"/>
-              </a:rPr>
-              <a:t>A1 = A2 が境目</a:t>
-            </a:r>
-            <a:r>
-              <a:rPr sz="1500">
-                <a:solidFill>
-                  <a:srgbClr val="33221E"/>
-                </a:solidFill>
-                <a:latin typeface="Avenir Next"/>
-                <a:ea typeface="Hiragino Sans"/>
-                <a:cs typeface="Hiragino Sans"/>
-              </a:rPr>
-              <a:t>。</a:t>
-            </a:r>
-          </a:p>
-        </p:txBody>
-      </p:sp>
-      <p:sp>
-        <p:nvSpPr>
-          <p:cNvPr id="11" name="TextBox 10"/>
+            <a:r>
+              <a:rPr sz="1400">
+                <a:solidFill>
+                  <a:srgbClr val="71635B"/>
+                </a:solidFill>
+                <a:latin typeface="Avenir Next"/>
+                <a:ea typeface="Hiragino Sans"/>
+                <a:cs typeface="Hiragino Sans"/>
+              </a:rPr>
+              <a:t>加速で貯めた面積 A1 を、減速の面積 A2 で使い切れば速度が 0 になり戻ってくる。A1 = A2 が境目。　出典｜コード/fig_ch07.py</a:t>
+            </a:r>
+          </a:p>
+        </p:txBody>
+      </p:sp>
+      <p:sp>
+        <p:nvSpPr>
+          <p:cNvPr id="5" name="TextBox 4"/>
           <p:cNvSpPr txBox="1"/>
           <p:nvPr/>
         </p:nvSpPr>
